--- a/exports/pptx/lessons/senior-module-03-ayurveda-good-health/day-06-bg-lifestyle.pptx
+++ b/exports/pptx/lessons/senior-module-03-ayurveda-good-health/day-06-bg-lifestyle.pptx
@@ -3671,8 +3671,8 @@
         </p:nvSpPr>
         <p:spPr>
           <a:xfrm>
-            <a:off x="406301" y="2851993"/>
-            <a:ext cx="8498026" cy="426541"/>
+            <a:off x="406301" y="1160413"/>
+            <a:ext cx="8498026" cy="213271"/>
           </a:xfrm>
           <a:prstGeom prst="rect">
             <a:avLst/>
@@ -3697,7 +3697,7 @@
               <a:buNone/>
             </a:pPr>
             <a:r>
-              <a:rPr lang="en-US" sz="1200" b="1" dirty="0">
+              <a:rPr lang="en-US" sz="1200" i="1" dirty="0">
                 <a:solidFill>
                   <a:srgbClr val="1A1A1A"/>
                 </a:solidFill>
@@ -3705,22 +3705,45 @@
                 <a:ea typeface="Georgia" pitchFamily="34" charset="-122"/>
                 <a:cs typeface="Georgia" pitchFamily="34" charset="-120"/>
               </a:rPr>
-              <a:t>Note the convergence is striking but not identical.</a:t>
-            </a:r>
-            <a:pPr algn="l" indent="0" marL="0">
-              <a:lnSpc>
-                <a:spcPts val="1680"/>
-              </a:lnSpc>
-              <a:spcBef>
-                <a:spcPts val="300"/>
-              </a:spcBef>
-              <a:spcAft>
-                <a:spcPts val="300"/>
-              </a:spcAft>
-              <a:buNone/>
-            </a:pPr>
-            <a:r>
-              <a:rPr lang="en-US" sz="1200" dirty="0">
+              <a:t>Each row: Traditional principle (Caraka, BG) · Modern lifestyle medicine equivalent · Evidence.</a:t>
+            </a:r>
+            <a:endParaRPr lang="en-US" sz="1200" dirty="0"/>
+          </a:p>
+        </p:txBody>
+      </p:sp>
+      <p:sp>
+        <p:nvSpPr>
+          <p:cNvPr id="6" name="Text 4"/>
+          <p:cNvSpPr/>
+          <p:nvPr/>
+        </p:nvSpPr>
+        <p:spPr>
+          <a:xfrm>
+            <a:off x="634901" y="1462534"/>
+            <a:ext cx="8102798" cy="1257002"/>
+          </a:xfrm>
+          <a:prstGeom prst="rect">
+            <a:avLst/>
+          </a:prstGeom>
+          <a:noFill/>
+          <a:ln/>
+        </p:spPr>
+        <p:txBody>
+          <a:bodyPr wrap="square" lIns="0" tIns="0" rIns="0" bIns="0" rtlCol="0" anchor="t"/>
+          <a:lstStyle/>
+          <a:p>
+            <a:pPr algn="l" marL="342900" indent="-342900">
+              <a:lnSpc>
+                <a:spcPts val="1620"/>
+              </a:lnSpc>
+              <a:spcAft>
+                <a:spcPts val="300"/>
+              </a:spcAft>
+              <a:buSzPct val="100000"/>
+              <a:buChar char="•"/>
+            </a:pPr>
+            <a:r>
+              <a:rPr lang="en-US" sz="1200" b="1" dirty="0">
                 <a:solidFill>
                   <a:srgbClr val="1A1A1A"/>
                 </a:solidFill>
@@ -3728,6 +3751,273 @@
                 <a:ea typeface="Georgia" pitchFamily="34" charset="-122"/>
                 <a:cs typeface="Georgia" pitchFamily="34" charset="-120"/>
               </a:rPr>
+              <a:t>Wake before sunrise</a:t>
+            </a:r>
+            <a:pPr algn="l" indent="0" marL="0">
+              <a:lnSpc>
+                <a:spcPts val="1620"/>
+              </a:lnSpc>
+              <a:spcAft>
+                <a:spcPts val="300"/>
+              </a:spcAft>
+              <a:buNone/>
+            </a:pPr>
+            <a:r>
+              <a:rPr lang="en-US" sz="1200" dirty="0">
+                <a:solidFill>
+                  <a:srgbClr val="1A1A1A"/>
+                </a:solidFill>
+                <a:latin typeface="Georgia" pitchFamily="34" charset="0"/>
+                <a:ea typeface="Georgia" pitchFamily="34" charset="-122"/>
+                <a:cs typeface="Georgia" pitchFamily="34" charset="-120"/>
+              </a:rPr>
+              <a:t> — Aligning with circadian rhythm · Nobel 2017 — circadian biology</a:t>
+            </a:r>
+            <a:endParaRPr lang="en-US" sz="1200" dirty="0"/>
+          </a:p>
+          <a:p>
+            <a:pPr algn="l" marL="342900" indent="-342900">
+              <a:lnSpc>
+                <a:spcPts val="1620"/>
+              </a:lnSpc>
+              <a:spcAft>
+                <a:spcPts val="300"/>
+              </a:spcAft>
+              <a:buSzPct val="100000"/>
+              <a:buChar char="•"/>
+            </a:pPr>
+            <a:r>
+              <a:rPr lang="en-US" sz="1200" b="1" dirty="0">
+                <a:solidFill>
+                  <a:srgbClr val="1A1A1A"/>
+                </a:solidFill>
+                <a:latin typeface="Georgia" pitchFamily="34" charset="0"/>
+                <a:ea typeface="Georgia" pitchFamily="34" charset="-122"/>
+                <a:cs typeface="Georgia" pitchFamily="34" charset="-120"/>
+              </a:rPr>
+              <a:t>Largest meal midday (Pitta peak)</a:t>
+            </a:r>
+            <a:pPr algn="l" indent="0" marL="0">
+              <a:lnSpc>
+                <a:spcPts val="1620"/>
+              </a:lnSpc>
+              <a:spcAft>
+                <a:spcPts val="300"/>
+              </a:spcAft>
+              <a:buNone/>
+            </a:pPr>
+            <a:r>
+              <a:rPr lang="en-US" sz="1200" dirty="0">
+                <a:solidFill>
+                  <a:srgbClr val="1A1A1A"/>
+                </a:solidFill>
+                <a:latin typeface="Georgia" pitchFamily="34" charset="0"/>
+                <a:ea typeface="Georgia" pitchFamily="34" charset="-122"/>
+                <a:cs typeface="Georgia" pitchFamily="34" charset="-120"/>
+              </a:rPr>
+              <a:t> — Time-restricted eating; metabolic window · Panda et al. (2018)</a:t>
+            </a:r>
+            <a:endParaRPr lang="en-US" sz="1200" dirty="0"/>
+          </a:p>
+          <a:p>
+            <a:pPr algn="l" marL="342900" indent="-342900">
+              <a:lnSpc>
+                <a:spcPts val="1620"/>
+              </a:lnSpc>
+              <a:spcAft>
+                <a:spcPts val="300"/>
+              </a:spcAft>
+              <a:buSzPct val="100000"/>
+              <a:buChar char="•"/>
+            </a:pPr>
+            <a:r>
+              <a:rPr lang="en-US" sz="1200" b="1" dirty="0">
+                <a:solidFill>
+                  <a:srgbClr val="1A1A1A"/>
+                </a:solidFill>
+                <a:latin typeface="Georgia" pitchFamily="34" charset="0"/>
+                <a:ea typeface="Georgia" pitchFamily="34" charset="-122"/>
+                <a:cs typeface="Georgia" pitchFamily="34" charset="-120"/>
+              </a:rPr>
+              <a:t>Sleep by ~10pm</a:t>
+            </a:r>
+            <a:pPr algn="l" indent="0" marL="0">
+              <a:lnSpc>
+                <a:spcPts val="1620"/>
+              </a:lnSpc>
+              <a:spcAft>
+                <a:spcPts val="300"/>
+              </a:spcAft>
+              <a:buNone/>
+            </a:pPr>
+            <a:r>
+              <a:rPr lang="en-US" sz="1200" dirty="0">
+                <a:solidFill>
+                  <a:srgbClr val="1A1A1A"/>
+                </a:solidFill>
+                <a:latin typeface="Georgia" pitchFamily="34" charset="0"/>
+                <a:ea typeface="Georgia" pitchFamily="34" charset="-122"/>
+                <a:cs typeface="Georgia" pitchFamily="34" charset="-120"/>
+              </a:rPr>
+              <a:t> — Aligning with melatonin curve · Sleep science (Walker 2017)</a:t>
+            </a:r>
+            <a:endParaRPr lang="en-US" sz="1200" dirty="0"/>
+          </a:p>
+          <a:p>
+            <a:pPr algn="l" marL="342900" indent="-342900">
+              <a:lnSpc>
+                <a:spcPts val="1620"/>
+              </a:lnSpc>
+              <a:spcAft>
+                <a:spcPts val="300"/>
+              </a:spcAft>
+              <a:buSzPct val="100000"/>
+              <a:buChar char="•"/>
+            </a:pPr>
+            <a:r>
+              <a:rPr lang="en-US" sz="1200" b="1" dirty="0">
+                <a:solidFill>
+                  <a:srgbClr val="1A1A1A"/>
+                </a:solidFill>
+                <a:latin typeface="Georgia" pitchFamily="34" charset="0"/>
+                <a:ea typeface="Georgia" pitchFamily="34" charset="-122"/>
+                <a:cs typeface="Georgia" pitchFamily="34" charset="-120"/>
+              </a:rPr>
+              <a:t>Regular exercise to 50% capacity</a:t>
+            </a:r>
+            <a:pPr algn="l" indent="0" marL="0">
+              <a:lnSpc>
+                <a:spcPts val="1620"/>
+              </a:lnSpc>
+              <a:spcAft>
+                <a:spcPts val="300"/>
+              </a:spcAft>
+              <a:buNone/>
+            </a:pPr>
+            <a:r>
+              <a:rPr lang="en-US" sz="1200" dirty="0">
+                <a:solidFill>
+                  <a:srgbClr val="1A1A1A"/>
+                </a:solidFill>
+                <a:latin typeface="Georgia" pitchFamily="34" charset="0"/>
+                <a:ea typeface="Georgia" pitchFamily="34" charset="-122"/>
+                <a:cs typeface="Georgia" pitchFamily="34" charset="-120"/>
+              </a:rPr>
+              <a:t> — Moderate-intensity training · Standard exercise physiology</a:t>
+            </a:r>
+            <a:endParaRPr lang="en-US" sz="1200" dirty="0"/>
+          </a:p>
+          <a:p>
+            <a:pPr algn="l" marL="342900" indent="-342900">
+              <a:lnSpc>
+                <a:spcPts val="1620"/>
+              </a:lnSpc>
+              <a:spcAft>
+                <a:spcPts val="300"/>
+              </a:spcAft>
+              <a:buSzPct val="100000"/>
+              <a:buChar char="•"/>
+            </a:pPr>
+            <a:r>
+              <a:rPr lang="en-US" sz="1200" b="1" dirty="0">
+                <a:solidFill>
+                  <a:srgbClr val="1A1A1A"/>
+                </a:solidFill>
+                <a:latin typeface="Georgia" pitchFamily="34" charset="0"/>
+                <a:ea typeface="Georgia" pitchFamily="34" charset="-122"/>
+                <a:cs typeface="Georgia" pitchFamily="34" charset="-120"/>
+              </a:rPr>
+              <a:t>Six tastes per meal</a:t>
+            </a:r>
+            <a:pPr algn="l" indent="0" marL="0">
+              <a:lnSpc>
+                <a:spcPts val="1620"/>
+              </a:lnSpc>
+              <a:spcAft>
+                <a:spcPts val="300"/>
+              </a:spcAft>
+              <a:buNone/>
+            </a:pPr>
+            <a:r>
+              <a:rPr lang="en-US" sz="1200" dirty="0">
+                <a:solidFill>
+                  <a:srgbClr val="1A1A1A"/>
+                </a:solidFill>
+                <a:latin typeface="Georgia" pitchFamily="34" charset="0"/>
+                <a:ea typeface="Georgia" pitchFamily="34" charset="-122"/>
+                <a:cs typeface="Georgia" pitchFamily="34" charset="-120"/>
+              </a:rPr>
+              <a:t> — Macronutrient diversity, polyphenol intake · Nutrition science</a:t>
+            </a:r>
+            <a:endParaRPr lang="en-US" sz="1200" dirty="0"/>
+          </a:p>
+        </p:txBody>
+      </p:sp>
+      <p:sp>
+        <p:nvSpPr>
+          <p:cNvPr id="7" name="Text 5"/>
+          <p:cNvSpPr/>
+          <p:nvPr/>
+        </p:nvSpPr>
+        <p:spPr>
+          <a:xfrm>
+            <a:off x="406301" y="2808387"/>
+            <a:ext cx="8498026" cy="426541"/>
+          </a:xfrm>
+          <a:prstGeom prst="rect">
+            <a:avLst/>
+          </a:prstGeom>
+          <a:noFill/>
+          <a:ln/>
+        </p:spPr>
+        <p:txBody>
+          <a:bodyPr wrap="square" lIns="0" tIns="0" rIns="0" bIns="0" rtlCol="0" anchor="t"/>
+          <a:lstStyle/>
+          <a:p>
+            <a:pPr algn="l" indent="0" marL="0">
+              <a:lnSpc>
+                <a:spcPts val="1680"/>
+              </a:lnSpc>
+              <a:spcBef>
+                <a:spcPts val="300"/>
+              </a:spcBef>
+              <a:spcAft>
+                <a:spcPts val="300"/>
+              </a:spcAft>
+              <a:buNone/>
+            </a:pPr>
+            <a:r>
+              <a:rPr lang="en-US" sz="1200" b="1" dirty="0">
+                <a:solidFill>
+                  <a:srgbClr val="1A1A1A"/>
+                </a:solidFill>
+                <a:latin typeface="Georgia" pitchFamily="34" charset="0"/>
+                <a:ea typeface="Georgia" pitchFamily="34" charset="-122"/>
+                <a:cs typeface="Georgia" pitchFamily="34" charset="-120"/>
+              </a:rPr>
+              <a:t>Note the convergence is striking but not identical.</a:t>
+            </a:r>
+            <a:pPr algn="l" indent="0" marL="0">
+              <a:lnSpc>
+                <a:spcPts val="1680"/>
+              </a:lnSpc>
+              <a:spcBef>
+                <a:spcPts val="300"/>
+              </a:spcBef>
+              <a:spcAft>
+                <a:spcPts val="300"/>
+              </a:spcAft>
+              <a:buNone/>
+            </a:pPr>
+            <a:r>
+              <a:rPr lang="en-US" sz="1200" dirty="0">
+                <a:solidFill>
+                  <a:srgbClr val="1A1A1A"/>
+                </a:solidFill>
+                <a:latin typeface="Georgia" pitchFamily="34" charset="0"/>
+                <a:ea typeface="Georgia" pitchFamily="34" charset="-122"/>
+                <a:cs typeface="Georgia" pitchFamily="34" charset="-120"/>
+              </a:rPr>
               <a:t> The tradition observed; modern science measures. They overlap in many places; they're not the same project.</a:t>
             </a:r>
             <a:endParaRPr lang="en-US" sz="1200" dirty="0"/>
@@ -3736,7 +4026,7 @@
       </p:sp>
       <p:sp>
         <p:nvSpPr>
-          <p:cNvPr id="6" name="Text 4"/>
+          <p:cNvPr id="8" name="Text 6"/>
           <p:cNvSpPr/>
           <p:nvPr/>
         </p:nvSpPr>

--- a/exports/pptx/lessons/senior-module-03-ayurveda-good-health/day-06-bg-lifestyle.pptx
+++ b/exports/pptx/lessons/senior-module-03-ayurveda-good-health/day-06-bg-lifestyle.pptx
@@ -16,9 +16,12 @@
     <p:sldId id="264" r:id="rId10"/>
     <p:sldId id="265" r:id="rId11"/>
     <p:sldId id="266" r:id="rId12"/>
+    <p:sldId id="267" r:id="rId13"/>
+    <p:sldId id="268" r:id="rId14"/>
+    <p:sldId id="269" r:id="rId15"/>
   </p:sldIdLst>
   <p:notesMasterIdLst>
-    <p:notesMasterId r:id="rId13"/>
+    <p:notesMasterId r:id="rId16"/>
   </p:notesMasterIdLst>
   <p:sldSz cx="9144000" cy="5143500"/>
   <p:notesSz cx="5143500" cy="9144000"/>
@@ -712,6 +715,270 @@
             <a:fld id="{F7021451-1387-4CA6-816F-3879F97B5CBC}" type="slidenum">
               <a:rPr lang="en-US"/>
               <a:t>11</a:t>
+            </a:fld>
+            <a:endParaRPr lang="en-US"/>
+          </a:p>
+        </p:txBody>
+      </p:sp>
+    </p:spTree>
+    <p:extLst>
+      <p:ext uri="{BB962C8B-B14F-4D97-AF65-F5344CB8AC3E}">
+        <p14:creationId xmlns:p14="http://schemas.microsoft.com/office/powerpoint/2010/main" val="1024086991"/>
+      </p:ext>
+    </p:extLst>
+  </p:cSld>
+  <p:clrMapOvr>
+    <a:masterClrMapping/>
+  </p:clrMapOvr>
+</p:notes>
+</file>
+
+<file path=ppt/notesSlides/notesSlide12.xml><?xml version="1.0" encoding="utf-8"?>
+<p:notes xmlns:a="http://schemas.openxmlformats.org/drawingml/2006/main" xmlns:r="http://schemas.openxmlformats.org/officeDocument/2006/relationships" xmlns:p="http://schemas.openxmlformats.org/presentationml/2006/main">
+  <p:cSld>
+    <p:spTree>
+      <p:nvGrpSpPr>
+        <p:cNvPr id="1" name=""/>
+        <p:cNvGrpSpPr/>
+        <p:nvPr/>
+      </p:nvGrpSpPr>
+      <p:grpSpPr>
+        <a:xfrm>
+          <a:off x="0" y="0"/>
+          <a:ext cx="0" cy="0"/>
+          <a:chOff x="0" y="0"/>
+          <a:chExt cx="0" cy="0"/>
+        </a:xfrm>
+      </p:grpSpPr>
+      <p:sp>
+        <p:nvSpPr>
+          <p:cNvPr id="2" name="Slide Image Placeholder 1"/>
+          <p:cNvSpPr>
+            <a:spLocks noGrp="1" noRot="1" noChangeAspect="1"/>
+          </p:cNvSpPr>
+          <p:nvPr>
+            <p:ph type="sldImg"/>
+          </p:nvPr>
+        </p:nvSpPr>
+        <p:spPr/>
+      </p:sp>
+      <p:sp>
+        <p:nvSpPr>
+          <p:cNvPr id="3" name="Notes Placeholder 2"/>
+          <p:cNvSpPr>
+            <a:spLocks noGrp="1"/>
+          </p:cNvSpPr>
+          <p:nvPr>
+            <p:ph type="body" idx="1"/>
+          </p:nvPr>
+        </p:nvSpPr>
+        <p:spPr/>
+        <p:txBody>
+          <a:bodyPr/>
+          <a:lstStyle/>
+          <a:p>
+            <a:r>
+              <a:rPr lang="en-US" dirty="0"/>
+              <a:t/>
+            </a:r>
+            <a:endParaRPr lang="en-US" dirty="0"/>
+          </a:p>
+        </p:txBody>
+      </p:sp>
+      <p:sp>
+        <p:nvSpPr>
+          <p:cNvPr id="4" name="Slide Number Placeholder 3"/>
+          <p:cNvSpPr>
+            <a:spLocks noGrp="1"/>
+          </p:cNvSpPr>
+          <p:nvPr>
+            <p:ph type="sldNum" sz="quarter" idx="10"/>
+          </p:nvPr>
+        </p:nvSpPr>
+        <p:spPr/>
+        <p:txBody>
+          <a:bodyPr/>
+          <a:lstStyle/>
+          <a:p>
+            <a:fld id="{F7021451-1387-4CA6-816F-3879F97B5CBC}" type="slidenum">
+              <a:rPr lang="en-US"/>
+              <a:t>12</a:t>
+            </a:fld>
+            <a:endParaRPr lang="en-US"/>
+          </a:p>
+        </p:txBody>
+      </p:sp>
+    </p:spTree>
+    <p:extLst>
+      <p:ext uri="{BB962C8B-B14F-4D97-AF65-F5344CB8AC3E}">
+        <p14:creationId xmlns:p14="http://schemas.microsoft.com/office/powerpoint/2010/main" val="1024086991"/>
+      </p:ext>
+    </p:extLst>
+  </p:cSld>
+  <p:clrMapOvr>
+    <a:masterClrMapping/>
+  </p:clrMapOvr>
+</p:notes>
+</file>
+
+<file path=ppt/notesSlides/notesSlide13.xml><?xml version="1.0" encoding="utf-8"?>
+<p:notes xmlns:a="http://schemas.openxmlformats.org/drawingml/2006/main" xmlns:r="http://schemas.openxmlformats.org/officeDocument/2006/relationships" xmlns:p="http://schemas.openxmlformats.org/presentationml/2006/main">
+  <p:cSld>
+    <p:spTree>
+      <p:nvGrpSpPr>
+        <p:cNvPr id="1" name=""/>
+        <p:cNvGrpSpPr/>
+        <p:nvPr/>
+      </p:nvGrpSpPr>
+      <p:grpSpPr>
+        <a:xfrm>
+          <a:off x="0" y="0"/>
+          <a:ext cx="0" cy="0"/>
+          <a:chOff x="0" y="0"/>
+          <a:chExt cx="0" cy="0"/>
+        </a:xfrm>
+      </p:grpSpPr>
+      <p:sp>
+        <p:nvSpPr>
+          <p:cNvPr id="2" name="Slide Image Placeholder 1"/>
+          <p:cNvSpPr>
+            <a:spLocks noGrp="1" noRot="1" noChangeAspect="1"/>
+          </p:cNvSpPr>
+          <p:nvPr>
+            <p:ph type="sldImg"/>
+          </p:nvPr>
+        </p:nvSpPr>
+        <p:spPr/>
+      </p:sp>
+      <p:sp>
+        <p:nvSpPr>
+          <p:cNvPr id="3" name="Notes Placeholder 2"/>
+          <p:cNvSpPr>
+            <a:spLocks noGrp="1"/>
+          </p:cNvSpPr>
+          <p:nvPr>
+            <p:ph type="body" idx="1"/>
+          </p:nvPr>
+        </p:nvSpPr>
+        <p:spPr/>
+        <p:txBody>
+          <a:bodyPr/>
+          <a:lstStyle/>
+          <a:p>
+            <a:r>
+              <a:rPr lang="en-US" dirty="0"/>
+              <a:t/>
+            </a:r>
+            <a:endParaRPr lang="en-US" dirty="0"/>
+          </a:p>
+        </p:txBody>
+      </p:sp>
+      <p:sp>
+        <p:nvSpPr>
+          <p:cNvPr id="4" name="Slide Number Placeholder 3"/>
+          <p:cNvSpPr>
+            <a:spLocks noGrp="1"/>
+          </p:cNvSpPr>
+          <p:nvPr>
+            <p:ph type="sldNum" sz="quarter" idx="10"/>
+          </p:nvPr>
+        </p:nvSpPr>
+        <p:spPr/>
+        <p:txBody>
+          <a:bodyPr/>
+          <a:lstStyle/>
+          <a:p>
+            <a:fld id="{F7021451-1387-4CA6-816F-3879F97B5CBC}" type="slidenum">
+              <a:rPr lang="en-US"/>
+              <a:t>13</a:t>
+            </a:fld>
+            <a:endParaRPr lang="en-US"/>
+          </a:p>
+        </p:txBody>
+      </p:sp>
+    </p:spTree>
+    <p:extLst>
+      <p:ext uri="{BB962C8B-B14F-4D97-AF65-F5344CB8AC3E}">
+        <p14:creationId xmlns:p14="http://schemas.microsoft.com/office/powerpoint/2010/main" val="1024086991"/>
+      </p:ext>
+    </p:extLst>
+  </p:cSld>
+  <p:clrMapOvr>
+    <a:masterClrMapping/>
+  </p:clrMapOvr>
+</p:notes>
+</file>
+
+<file path=ppt/notesSlides/notesSlide14.xml><?xml version="1.0" encoding="utf-8"?>
+<p:notes xmlns:a="http://schemas.openxmlformats.org/drawingml/2006/main" xmlns:r="http://schemas.openxmlformats.org/officeDocument/2006/relationships" xmlns:p="http://schemas.openxmlformats.org/presentationml/2006/main">
+  <p:cSld>
+    <p:spTree>
+      <p:nvGrpSpPr>
+        <p:cNvPr id="1" name=""/>
+        <p:cNvGrpSpPr/>
+        <p:nvPr/>
+      </p:nvGrpSpPr>
+      <p:grpSpPr>
+        <a:xfrm>
+          <a:off x="0" y="0"/>
+          <a:ext cx="0" cy="0"/>
+          <a:chOff x="0" y="0"/>
+          <a:chExt cx="0" cy="0"/>
+        </a:xfrm>
+      </p:grpSpPr>
+      <p:sp>
+        <p:nvSpPr>
+          <p:cNvPr id="2" name="Slide Image Placeholder 1"/>
+          <p:cNvSpPr>
+            <a:spLocks noGrp="1" noRot="1" noChangeAspect="1"/>
+          </p:cNvSpPr>
+          <p:nvPr>
+            <p:ph type="sldImg"/>
+          </p:nvPr>
+        </p:nvSpPr>
+        <p:spPr/>
+      </p:sp>
+      <p:sp>
+        <p:nvSpPr>
+          <p:cNvPr id="3" name="Notes Placeholder 2"/>
+          <p:cNvSpPr>
+            <a:spLocks noGrp="1"/>
+          </p:cNvSpPr>
+          <p:nvPr>
+            <p:ph type="body" idx="1"/>
+          </p:nvPr>
+        </p:nvSpPr>
+        <p:spPr/>
+        <p:txBody>
+          <a:bodyPr/>
+          <a:lstStyle/>
+          <a:p>
+            <a:r>
+              <a:rPr lang="en-US" dirty="0"/>
+              <a:t/>
+            </a:r>
+            <a:endParaRPr lang="en-US" dirty="0"/>
+          </a:p>
+        </p:txBody>
+      </p:sp>
+      <p:sp>
+        <p:nvSpPr>
+          <p:cNvPr id="4" name="Slide Number Placeholder 3"/>
+          <p:cNvSpPr>
+            <a:spLocks noGrp="1"/>
+          </p:cNvSpPr>
+          <p:nvPr>
+            <p:ph type="sldNum" sz="quarter" idx="10"/>
+          </p:nvPr>
+        </p:nvSpPr>
+        <p:spPr/>
+        <p:txBody>
+          <a:bodyPr/>
+          <a:lstStyle/>
+          <a:p>
+            <a:fld id="{F7021451-1387-4CA6-816F-3879F97B5CBC}" type="slidenum">
+              <a:rPr lang="en-US"/>
+              <a:t>14</a:t>
             </a:fld>
             <a:endParaRPr lang="en-US"/>
           </a:p>
@@ -1965,102 +2232,6 @@
         </p:nvSpPr>
         <p:spPr>
           <a:xfrm>
-            <a:off x="406301" y="1223963"/>
-            <a:ext cx="8498026" cy="274290"/>
-          </a:xfrm>
-          <a:prstGeom prst="rect">
-            <a:avLst/>
-          </a:prstGeom>
-          <a:noFill/>
-          <a:ln/>
-        </p:spPr>
-        <p:txBody>
-          <a:bodyPr wrap="square" lIns="0" tIns="0" rIns="0" bIns="0" rtlCol="0" anchor="t"/>
-          <a:lstStyle/>
-          <a:p>
-            <a:pPr algn="l" indent="0" marL="0">
-              <a:lnSpc>
-                <a:spcPts val="2160"/>
-              </a:lnSpc>
-              <a:spcBef>
-                <a:spcPts val="600"/>
-              </a:spcBef>
-              <a:spcAft>
-                <a:spcPts val="800"/>
-              </a:spcAft>
-              <a:buNone/>
-            </a:pPr>
-            <a:r>
-              <a:rPr lang="en-US" sz="1800" b="1" dirty="0">
-                <a:solidFill>
-                  <a:srgbClr val="997929"/>
-                </a:solidFill>
-                <a:latin typeface="Times New Roman" pitchFamily="34" charset="0"/>
-                <a:ea typeface="Times New Roman" pitchFamily="34" charset="-122"/>
-                <a:cs typeface="Times New Roman" pitchFamily="34" charset="-120"/>
-              </a:rPr>
-              <a:t>Learning objective</a:t>
-            </a:r>
-            <a:endParaRPr lang="en-US" sz="1800" dirty="0"/>
-          </a:p>
-        </p:txBody>
-      </p:sp>
-      <p:sp>
-        <p:nvSpPr>
-          <p:cNvPr id="6" name="Text 4"/>
-          <p:cNvSpPr/>
-          <p:nvPr/>
-        </p:nvSpPr>
-        <p:spPr>
-          <a:xfrm>
-            <a:off x="406301" y="1637854"/>
-            <a:ext cx="8498026" cy="426541"/>
-          </a:xfrm>
-          <a:prstGeom prst="rect">
-            <a:avLst/>
-          </a:prstGeom>
-          <a:noFill/>
-          <a:ln/>
-        </p:spPr>
-        <p:txBody>
-          <a:bodyPr wrap="square" lIns="0" tIns="0" rIns="0" bIns="0" rtlCol="0" anchor="t"/>
-          <a:lstStyle/>
-          <a:p>
-            <a:pPr algn="l" indent="0" marL="0">
-              <a:lnSpc>
-                <a:spcPts val="1680"/>
-              </a:lnSpc>
-              <a:spcBef>
-                <a:spcPts val="300"/>
-              </a:spcBef>
-              <a:spcAft>
-                <a:spcPts val="300"/>
-              </a:spcAft>
-              <a:buNone/>
-            </a:pPr>
-            <a:r>
-              <a:rPr lang="en-US" sz="1200" dirty="0">
-                <a:solidFill>
-                  <a:srgbClr val="1A1A1A"/>
-                </a:solidFill>
-                <a:latin typeface="Georgia" pitchFamily="34" charset="0"/>
-                <a:ea typeface="Georgia" pitchFamily="34" charset="-122"/>
-                <a:cs typeface="Georgia" pitchFamily="34" charset="-120"/>
-              </a:rPr>
-              <a:t>Students read BG 6.17 in IAST + translation and articulate the convergence between traditional dinacharya and modern lifestyle medicine.</a:t>
-            </a:r>
-            <a:endParaRPr lang="en-US" sz="1200" dirty="0"/>
-          </a:p>
-        </p:txBody>
-      </p:sp>
-      <p:sp>
-        <p:nvSpPr>
-          <p:cNvPr id="7" name="Text 5"/>
-          <p:cNvSpPr/>
-          <p:nvPr/>
-        </p:nvSpPr>
-        <p:spPr>
-          <a:xfrm>
             <a:off x="406301" y="4434929"/>
             <a:ext cx="8498026" cy="213271"/>
           </a:xfrm>
@@ -2205,7 +2376,7 @@
                 <a:ea typeface="Times New Roman" pitchFamily="34" charset="-122"/>
                 <a:cs typeface="Times New Roman" pitchFamily="34" charset="-120"/>
               </a:rPr>
-              <a:t>Teacher notes</a:t>
+              <a:t>Discussion (8 min)</a:t>
             </a:r>
             <a:endParaRPr lang="en-US" sz="1800" dirty="0"/>
           </a:p>
@@ -2219,8 +2390,8 @@
         </p:nvSpPr>
         <p:spPr>
           <a:xfrm>
-            <a:off x="406301" y="870942"/>
-            <a:ext cx="8498026" cy="426541"/>
+            <a:off x="634901" y="883593"/>
+            <a:ext cx="8102798" cy="525661"/>
           </a:xfrm>
           <a:prstGeom prst="rect">
             <a:avLst/>
@@ -2232,20 +2403,18 @@
           <a:bodyPr wrap="square" lIns="0" tIns="0" rIns="0" bIns="0" rtlCol="0" anchor="t"/>
           <a:lstStyle/>
           <a:p>
-            <a:pPr algn="l" indent="0" marL="0">
-              <a:lnSpc>
-                <a:spcPts val="1680"/>
-              </a:lnSpc>
-              <a:spcBef>
-                <a:spcPts val="300"/>
-              </a:spcBef>
-              <a:spcAft>
-                <a:spcPts val="300"/>
-              </a:spcAft>
-              <a:buNone/>
-            </a:pPr>
-            <a:r>
-              <a:rPr lang="en-US" sz="1200" dirty="0">
+            <a:pPr algn="l" marL="342900" indent="-342900">
+              <a:lnSpc>
+                <a:spcPts val="1620"/>
+              </a:lnSpc>
+              <a:spcAft>
+                <a:spcPts val="300"/>
+              </a:spcAft>
+              <a:buSzPct val="100000"/>
+              <a:buChar char="•"/>
+            </a:pPr>
+            <a:r>
+              <a:rPr lang="en-US" sz="1200" i="1" dirty="0">
                 <a:solidFill>
                   <a:srgbClr val="1A1A1A"/>
                 </a:solidFill>
@@ -2253,7 +2422,31 @@
                 <a:ea typeface="Georgia" pitchFamily="34" charset="-122"/>
                 <a:cs typeface="Georgia" pitchFamily="34" charset="-120"/>
               </a:rPr>
-              <a:t>– Convergence is a powerful pedagogical moment but DON'T oversell ("Ayurveda predicted everything"). – The honest framing: tradition + science arrived at overlapping conclusions by different methods.</a:t>
+              <a:t>"Is the convergence evidence that the tradition was 'right'? Or that human physiology hasn't changed?"</a:t>
+            </a:r>
+            <a:endParaRPr lang="en-US" sz="1200" dirty="0"/>
+          </a:p>
+          <a:p>
+            <a:pPr algn="l" marL="342900" indent="-342900">
+              <a:lnSpc>
+                <a:spcPts val="1620"/>
+              </a:lnSpc>
+              <a:spcAft>
+                <a:spcPts val="300"/>
+              </a:spcAft>
+              <a:buSzPct val="100000"/>
+              <a:buChar char="•"/>
+            </a:pPr>
+            <a:r>
+              <a:rPr lang="en-US" sz="1200" dirty="0">
+                <a:solidFill>
+                  <a:srgbClr val="1A1A1A"/>
+                </a:solidFill>
+                <a:latin typeface="Georgia" pitchFamily="34" charset="0"/>
+                <a:ea typeface="Georgia" pitchFamily="34" charset="-122"/>
+                <a:cs typeface="Georgia" pitchFamily="34" charset="-120"/>
+              </a:rPr>
+              <a:t>Both. Don't force a binary.</a:t>
             </a:r>
             <a:endParaRPr lang="en-US" sz="1200" dirty="0"/>
           </a:p>
@@ -2411,7 +2604,7 @@
                 <a:ea typeface="Times New Roman" pitchFamily="34" charset="-122"/>
                 <a:cs typeface="Times New Roman" pitchFamily="34" charset="-120"/>
               </a:rPr>
-              <a:t>Citation(s) used</a:t>
+              <a:t>Wrap-up (2 min)</a:t>
             </a:r>
             <a:endParaRPr lang="en-US" sz="1800" dirty="0"/>
           </a:p>
@@ -2425,8 +2618,8 @@
         </p:nvSpPr>
         <p:spPr>
           <a:xfrm>
-            <a:off x="406301" y="870942"/>
-            <a:ext cx="8498026" cy="213271"/>
+            <a:off x="634901" y="883593"/>
+            <a:ext cx="8102798" cy="281880"/>
           </a:xfrm>
           <a:prstGeom prst="rect">
             <a:avLst/>
@@ -2438,17 +2631,15 @@
           <a:bodyPr wrap="square" lIns="0" tIns="0" rIns="0" bIns="0" rtlCol="0" anchor="t"/>
           <a:lstStyle/>
           <a:p>
-            <a:pPr algn="l" indent="0" marL="0">
-              <a:lnSpc>
-                <a:spcPts val="1680"/>
-              </a:lnSpc>
-              <a:spcBef>
-                <a:spcPts val="300"/>
-              </a:spcBef>
-              <a:spcAft>
-                <a:spcPts val="300"/>
-              </a:spcAft>
-              <a:buNone/>
+            <a:pPr algn="l" marL="342900" indent="-342900">
+              <a:lnSpc>
+                <a:spcPts val="1620"/>
+              </a:lnSpc>
+              <a:spcAft>
+                <a:spcPts val="300"/>
+              </a:spcAft>
+              <a:buSzPct val="100000"/>
+              <a:buChar char="•"/>
             </a:pPr>
             <a:r>
               <a:rPr lang="en-US" sz="1200" dirty="0">
@@ -2459,7 +2650,815 @@
                 <a:ea typeface="Georgia" pitchFamily="34" charset="-122"/>
                 <a:cs typeface="Georgia" pitchFamily="34" charset="-120"/>
               </a:rPr>
-              <a:t>– BG 6.17 — vidya-karana RAG cache. – Bryant (2009). – Panda (2018), Walker (2017).</a:t>
+              <a:t>Preview Day 7: </a:t>
+            </a:r>
+            <a:pPr algn="l" indent="0" marL="0">
+              <a:lnSpc>
+                <a:spcPts val="1620"/>
+              </a:lnSpc>
+              <a:spcAft>
+                <a:spcPts val="300"/>
+              </a:spcAft>
+              <a:buNone/>
+            </a:pPr>
+            <a:r>
+              <a:rPr lang="en-US" sz="1200" i="1" dirty="0">
+                <a:solidFill>
+                  <a:srgbClr val="1A1A1A"/>
+                </a:solidFill>
+                <a:latin typeface="Georgia" pitchFamily="34" charset="0"/>
+                <a:ea typeface="Georgia" pitchFamily="34" charset="-122"/>
+                <a:cs typeface="Georgia" pitchFamily="34" charset="-120"/>
+              </a:rPr>
+              <a:t>"Tomorrow — the contemporary integration debate."</a:t>
+            </a:r>
+            <a:endParaRPr lang="en-US" sz="1200" dirty="0"/>
+          </a:p>
+        </p:txBody>
+      </p:sp>
+      <p:sp>
+        <p:nvSpPr>
+          <p:cNvPr id="5" name="Text 3"/>
+          <p:cNvSpPr/>
+          <p:nvPr/>
+        </p:nvSpPr>
+        <p:spPr>
+          <a:xfrm>
+            <a:off x="406301" y="4434929"/>
+            <a:ext cx="8498026" cy="213271"/>
+          </a:xfrm>
+          <a:prstGeom prst="rect">
+            <a:avLst/>
+          </a:prstGeom>
+          <a:noFill/>
+          <a:ln/>
+        </p:spPr>
+        <p:txBody>
+          <a:bodyPr wrap="square" lIns="0" tIns="0" rIns="0" bIns="0" rtlCol="0" anchor="t"/>
+          <a:lstStyle/>
+          <a:p>
+            <a:pPr algn="l" indent="0" marL="0">
+              <a:lnSpc>
+                <a:spcPts val="1680"/>
+              </a:lnSpc>
+              <a:spcBef>
+                <a:spcPts val="300"/>
+              </a:spcBef>
+              <a:spcAft>
+                <a:spcPts val="300"/>
+              </a:spcAft>
+              <a:buNone/>
+            </a:pPr>
+            <a:r>
+              <a:rPr lang="en-US" sz="1200" dirty="0">
+                <a:solidFill>
+                  <a:srgbClr val="1A1A1A"/>
+                </a:solidFill>
+                <a:latin typeface="Georgia" pitchFamily="34" charset="0"/>
+                <a:ea typeface="Georgia" pitchFamily="34" charset="-122"/>
+                <a:cs typeface="Georgia" pitchFamily="34" charset="-120"/>
+              </a:rPr>
+              <a:t>Senior ·  · IKS Curriculum</a:t>
+            </a:r>
+            <a:endParaRPr lang="en-US" sz="1200" dirty="0"/>
+          </a:p>
+        </p:txBody>
+      </p:sp>
+    </p:spTree>
+  </p:cSld>
+  <p:clrMapOvr>
+    <a:masterClrMapping/>
+  </p:clrMapOvr>
+</p:sld>
+</file>
+
+<file path=ppt/slides/slide12.xml><?xml version="1.0" encoding="utf-8"?>
+<p:sld xmlns:a="http://schemas.openxmlformats.org/drawingml/2006/main" xmlns:r="http://schemas.openxmlformats.org/officeDocument/2006/relationships" xmlns:p="http://schemas.openxmlformats.org/presentationml/2006/main">
+  <p:cSld name="Slide 12">
+    <p:bg>
+      <p:bgPr>
+        <a:solidFill>
+          <a:srgbClr val="FAF7F2"/>
+        </a:solidFill>
+      </p:bgPr>
+    </p:bg>
+    <p:spTree>
+      <p:nvGrpSpPr>
+        <p:cNvPr id="1" name=""/>
+        <p:cNvGrpSpPr/>
+        <p:nvPr/>
+      </p:nvGrpSpPr>
+      <p:grpSpPr>
+        <a:xfrm>
+          <a:off x="0" y="0"/>
+          <a:ext cx="0" cy="0"/>
+          <a:chOff x="0" y="0"/>
+          <a:chExt cx="0" cy="0"/>
+        </a:xfrm>
+      </p:grpSpPr>
+      <p:sp>
+        <p:nvSpPr>
+          <p:cNvPr id="2" name="Text 0"/>
+          <p:cNvSpPr/>
+          <p:nvPr/>
+        </p:nvSpPr>
+        <p:spPr>
+          <a:xfrm>
+            <a:off x="0" y="0"/>
+            <a:ext cx="9144000" cy="101501"/>
+          </a:xfrm>
+          <a:prstGeom prst="rect">
+            <a:avLst/>
+          </a:prstGeom>
+          <a:solidFill>
+            <a:srgbClr val="5D1D2E"/>
+          </a:solidFill>
+          <a:ln/>
+        </p:spPr>
+        <p:txBody>
+          <a:bodyPr wrap="square" rtlCol="0" anchor="ctr"/>
+          <a:lstStyle/>
+          <a:p>
+            <a:pPr indent="0" marL="0">
+              <a:buNone/>
+            </a:pPr>
+            <a:endParaRPr lang="en-US" dirty="0"/>
+          </a:p>
+        </p:txBody>
+      </p:sp>
+      <p:sp>
+        <p:nvSpPr>
+          <p:cNvPr id="3" name="Text 1"/>
+          <p:cNvSpPr/>
+          <p:nvPr/>
+        </p:nvSpPr>
+        <p:spPr>
+          <a:xfrm>
+            <a:off x="406301" y="457051"/>
+            <a:ext cx="8498026" cy="274290"/>
+          </a:xfrm>
+          <a:prstGeom prst="rect">
+            <a:avLst/>
+          </a:prstGeom>
+          <a:noFill/>
+          <a:ln/>
+        </p:spPr>
+        <p:txBody>
+          <a:bodyPr wrap="square" lIns="0" tIns="0" rIns="0" bIns="0" rtlCol="0" anchor="t"/>
+          <a:lstStyle/>
+          <a:p>
+            <a:pPr algn="l" indent="0" marL="0">
+              <a:lnSpc>
+                <a:spcPts val="2160"/>
+              </a:lnSpc>
+              <a:spcBef>
+                <a:spcPts val="600"/>
+              </a:spcBef>
+              <a:spcAft>
+                <a:spcPts val="800"/>
+              </a:spcAft>
+              <a:buNone/>
+            </a:pPr>
+            <a:r>
+              <a:rPr lang="en-US" sz="1800" b="1" dirty="0">
+                <a:solidFill>
+                  <a:srgbClr val="997929"/>
+                </a:solidFill>
+                <a:latin typeface="Times New Roman" pitchFamily="34" charset="0"/>
+                <a:ea typeface="Times New Roman" pitchFamily="34" charset="-122"/>
+                <a:cs typeface="Times New Roman" pitchFamily="34" charset="-120"/>
+              </a:rPr>
+              <a:t>Differentiation</a:t>
+            </a:r>
+            <a:endParaRPr lang="en-US" sz="1800" dirty="0"/>
+          </a:p>
+        </p:txBody>
+      </p:sp>
+      <p:sp>
+        <p:nvSpPr>
+          <p:cNvPr id="4" name="Text 2"/>
+          <p:cNvSpPr/>
+          <p:nvPr/>
+        </p:nvSpPr>
+        <p:spPr>
+          <a:xfrm>
+            <a:off x="634901" y="883593"/>
+            <a:ext cx="8102798" cy="525661"/>
+          </a:xfrm>
+          <a:prstGeom prst="rect">
+            <a:avLst/>
+          </a:prstGeom>
+          <a:noFill/>
+          <a:ln/>
+        </p:spPr>
+        <p:txBody>
+          <a:bodyPr wrap="square" lIns="0" tIns="0" rIns="0" bIns="0" rtlCol="0" anchor="t"/>
+          <a:lstStyle/>
+          <a:p>
+            <a:pPr algn="l" marL="342900" indent="-342900">
+              <a:lnSpc>
+                <a:spcPts val="1620"/>
+              </a:lnSpc>
+              <a:spcAft>
+                <a:spcPts val="300"/>
+              </a:spcAft>
+              <a:buSzPct val="100000"/>
+              <a:buChar char="•"/>
+            </a:pPr>
+            <a:r>
+              <a:rPr lang="en-US" sz="1200" b="1" dirty="0">
+                <a:solidFill>
+                  <a:srgbClr val="1A1A1A"/>
+                </a:solidFill>
+                <a:latin typeface="Georgia" pitchFamily="34" charset="0"/>
+                <a:ea typeface="Georgia" pitchFamily="34" charset="-122"/>
+                <a:cs typeface="Georgia" pitchFamily="34" charset="-120"/>
+              </a:rPr>
+              <a:t>Tier up:</a:t>
+            </a:r>
+            <a:pPr algn="l" indent="0" marL="0">
+              <a:lnSpc>
+                <a:spcPts val="1620"/>
+              </a:lnSpc>
+              <a:spcAft>
+                <a:spcPts val="300"/>
+              </a:spcAft>
+              <a:buNone/>
+            </a:pPr>
+            <a:r>
+              <a:rPr lang="en-US" sz="1200" dirty="0">
+                <a:solidFill>
+                  <a:srgbClr val="1A1A1A"/>
+                </a:solidFill>
+                <a:latin typeface="Georgia" pitchFamily="34" charset="0"/>
+                <a:ea typeface="Georgia" pitchFamily="34" charset="-122"/>
+                <a:cs typeface="Georgia" pitchFamily="34" charset="-120"/>
+              </a:rPr>
+              <a:t> Read Walker (2017) </a:t>
+            </a:r>
+            <a:pPr algn="l" indent="0" marL="0">
+              <a:lnSpc>
+                <a:spcPts val="1620"/>
+              </a:lnSpc>
+              <a:spcAft>
+                <a:spcPts val="300"/>
+              </a:spcAft>
+              <a:buNone/>
+            </a:pPr>
+            <a:r>
+              <a:rPr lang="en-US" sz="1200" i="1" dirty="0">
+                <a:solidFill>
+                  <a:srgbClr val="1A1A1A"/>
+                </a:solidFill>
+                <a:latin typeface="Georgia" pitchFamily="34" charset="0"/>
+                <a:ea typeface="Georgia" pitchFamily="34" charset="-122"/>
+                <a:cs typeface="Georgia" pitchFamily="34" charset="-120"/>
+              </a:rPr>
+              <a:t>Why We Sleep</a:t>
+            </a:r>
+            <a:pPr algn="l" indent="0" marL="0">
+              <a:lnSpc>
+                <a:spcPts val="1620"/>
+              </a:lnSpc>
+              <a:spcAft>
+                <a:spcPts val="300"/>
+              </a:spcAft>
+              <a:buNone/>
+            </a:pPr>
+            <a:r>
+              <a:rPr lang="en-US" sz="1200" dirty="0">
+                <a:solidFill>
+                  <a:srgbClr val="1A1A1A"/>
+                </a:solidFill>
+                <a:latin typeface="Georgia" pitchFamily="34" charset="0"/>
+                <a:ea typeface="Georgia" pitchFamily="34" charset="-122"/>
+                <a:cs typeface="Georgia" pitchFamily="34" charset="-120"/>
+              </a:rPr>
+              <a:t> chapter on circadian.</a:t>
+            </a:r>
+            <a:endParaRPr lang="en-US" sz="1200" dirty="0"/>
+          </a:p>
+          <a:p>
+            <a:pPr algn="l" marL="342900" indent="-342900">
+              <a:lnSpc>
+                <a:spcPts val="1620"/>
+              </a:lnSpc>
+              <a:spcAft>
+                <a:spcPts val="300"/>
+              </a:spcAft>
+              <a:buSzPct val="100000"/>
+              <a:buChar char="•"/>
+            </a:pPr>
+            <a:r>
+              <a:rPr lang="en-US" sz="1200" b="1" dirty="0">
+                <a:solidFill>
+                  <a:srgbClr val="1A1A1A"/>
+                </a:solidFill>
+                <a:latin typeface="Georgia" pitchFamily="34" charset="0"/>
+                <a:ea typeface="Georgia" pitchFamily="34" charset="-122"/>
+                <a:cs typeface="Georgia" pitchFamily="34" charset="-120"/>
+              </a:rPr>
+              <a:t>Tier down:</a:t>
+            </a:r>
+            <a:pPr algn="l" indent="0" marL="0">
+              <a:lnSpc>
+                <a:spcPts val="1620"/>
+              </a:lnSpc>
+              <a:spcAft>
+                <a:spcPts val="300"/>
+              </a:spcAft>
+              <a:buNone/>
+            </a:pPr>
+            <a:r>
+              <a:rPr lang="en-US" sz="1200" dirty="0">
+                <a:solidFill>
+                  <a:srgbClr val="1A1A1A"/>
+                </a:solidFill>
+                <a:latin typeface="Georgia" pitchFamily="34" charset="0"/>
+                <a:ea typeface="Georgia" pitchFamily="34" charset="-122"/>
+                <a:cs typeface="Georgia" pitchFamily="34" charset="-120"/>
+              </a:rPr>
+              <a:t> Focus on the convergence table.</a:t>
+            </a:r>
+            <a:endParaRPr lang="en-US" sz="1200" dirty="0"/>
+          </a:p>
+        </p:txBody>
+      </p:sp>
+      <p:sp>
+        <p:nvSpPr>
+          <p:cNvPr id="5" name="Text 3"/>
+          <p:cNvSpPr/>
+          <p:nvPr/>
+        </p:nvSpPr>
+        <p:spPr>
+          <a:xfrm>
+            <a:off x="406301" y="4434929"/>
+            <a:ext cx="8498026" cy="213271"/>
+          </a:xfrm>
+          <a:prstGeom prst="rect">
+            <a:avLst/>
+          </a:prstGeom>
+          <a:noFill/>
+          <a:ln/>
+        </p:spPr>
+        <p:txBody>
+          <a:bodyPr wrap="square" lIns="0" tIns="0" rIns="0" bIns="0" rtlCol="0" anchor="t"/>
+          <a:lstStyle/>
+          <a:p>
+            <a:pPr algn="l" indent="0" marL="0">
+              <a:lnSpc>
+                <a:spcPts val="1680"/>
+              </a:lnSpc>
+              <a:spcBef>
+                <a:spcPts val="300"/>
+              </a:spcBef>
+              <a:spcAft>
+                <a:spcPts val="300"/>
+              </a:spcAft>
+              <a:buNone/>
+            </a:pPr>
+            <a:r>
+              <a:rPr lang="en-US" sz="1200" dirty="0">
+                <a:solidFill>
+                  <a:srgbClr val="1A1A1A"/>
+                </a:solidFill>
+                <a:latin typeface="Georgia" pitchFamily="34" charset="0"/>
+                <a:ea typeface="Georgia" pitchFamily="34" charset="-122"/>
+                <a:cs typeface="Georgia" pitchFamily="34" charset="-120"/>
+              </a:rPr>
+              <a:t>Senior ·  · IKS Curriculum</a:t>
+            </a:r>
+            <a:endParaRPr lang="en-US" sz="1200" dirty="0"/>
+          </a:p>
+        </p:txBody>
+      </p:sp>
+    </p:spTree>
+  </p:cSld>
+  <p:clrMapOvr>
+    <a:masterClrMapping/>
+  </p:clrMapOvr>
+</p:sld>
+</file>
+
+<file path=ppt/slides/slide13.xml><?xml version="1.0" encoding="utf-8"?>
+<p:sld xmlns:a="http://schemas.openxmlformats.org/drawingml/2006/main" xmlns:r="http://schemas.openxmlformats.org/officeDocument/2006/relationships" xmlns:p="http://schemas.openxmlformats.org/presentationml/2006/main">
+  <p:cSld name="Slide 13">
+    <p:bg>
+      <p:bgPr>
+        <a:solidFill>
+          <a:srgbClr val="FAF7F2"/>
+        </a:solidFill>
+      </p:bgPr>
+    </p:bg>
+    <p:spTree>
+      <p:nvGrpSpPr>
+        <p:cNvPr id="1" name=""/>
+        <p:cNvGrpSpPr/>
+        <p:nvPr/>
+      </p:nvGrpSpPr>
+      <p:grpSpPr>
+        <a:xfrm>
+          <a:off x="0" y="0"/>
+          <a:ext cx="0" cy="0"/>
+          <a:chOff x="0" y="0"/>
+          <a:chExt cx="0" cy="0"/>
+        </a:xfrm>
+      </p:grpSpPr>
+      <p:sp>
+        <p:nvSpPr>
+          <p:cNvPr id="2" name="Text 0"/>
+          <p:cNvSpPr/>
+          <p:nvPr/>
+        </p:nvSpPr>
+        <p:spPr>
+          <a:xfrm>
+            <a:off x="0" y="0"/>
+            <a:ext cx="9144000" cy="101501"/>
+          </a:xfrm>
+          <a:prstGeom prst="rect">
+            <a:avLst/>
+          </a:prstGeom>
+          <a:solidFill>
+            <a:srgbClr val="5D1D2E"/>
+          </a:solidFill>
+          <a:ln/>
+        </p:spPr>
+        <p:txBody>
+          <a:bodyPr wrap="square" rtlCol="0" anchor="ctr"/>
+          <a:lstStyle/>
+          <a:p>
+            <a:pPr indent="0" marL="0">
+              <a:buNone/>
+            </a:pPr>
+            <a:endParaRPr lang="en-US" dirty="0"/>
+          </a:p>
+        </p:txBody>
+      </p:sp>
+      <p:sp>
+        <p:nvSpPr>
+          <p:cNvPr id="3" name="Text 1"/>
+          <p:cNvSpPr/>
+          <p:nvPr/>
+        </p:nvSpPr>
+        <p:spPr>
+          <a:xfrm>
+            <a:off x="406301" y="457051"/>
+            <a:ext cx="8498026" cy="274290"/>
+          </a:xfrm>
+          <a:prstGeom prst="rect">
+            <a:avLst/>
+          </a:prstGeom>
+          <a:noFill/>
+          <a:ln/>
+        </p:spPr>
+        <p:txBody>
+          <a:bodyPr wrap="square" lIns="0" tIns="0" rIns="0" bIns="0" rtlCol="0" anchor="t"/>
+          <a:lstStyle/>
+          <a:p>
+            <a:pPr algn="l" indent="0" marL="0">
+              <a:lnSpc>
+                <a:spcPts val="2160"/>
+              </a:lnSpc>
+              <a:spcBef>
+                <a:spcPts val="600"/>
+              </a:spcBef>
+              <a:spcAft>
+                <a:spcPts val="800"/>
+              </a:spcAft>
+              <a:buNone/>
+            </a:pPr>
+            <a:r>
+              <a:rPr lang="en-US" sz="1800" b="1" dirty="0">
+                <a:solidFill>
+                  <a:srgbClr val="997929"/>
+                </a:solidFill>
+                <a:latin typeface="Times New Roman" pitchFamily="34" charset="0"/>
+                <a:ea typeface="Times New Roman" pitchFamily="34" charset="-122"/>
+                <a:cs typeface="Times New Roman" pitchFamily="34" charset="-120"/>
+              </a:rPr>
+              <a:t>Teacher notes</a:t>
+            </a:r>
+            <a:endParaRPr lang="en-US" sz="1800" dirty="0"/>
+          </a:p>
+        </p:txBody>
+      </p:sp>
+      <p:sp>
+        <p:nvSpPr>
+          <p:cNvPr id="4" name="Text 2"/>
+          <p:cNvSpPr/>
+          <p:nvPr/>
+        </p:nvSpPr>
+        <p:spPr>
+          <a:xfrm>
+            <a:off x="634901" y="883593"/>
+            <a:ext cx="8102798" cy="525661"/>
+          </a:xfrm>
+          <a:prstGeom prst="rect">
+            <a:avLst/>
+          </a:prstGeom>
+          <a:noFill/>
+          <a:ln/>
+        </p:spPr>
+        <p:txBody>
+          <a:bodyPr wrap="square" lIns="0" tIns="0" rIns="0" bIns="0" rtlCol="0" anchor="t"/>
+          <a:lstStyle/>
+          <a:p>
+            <a:pPr algn="l" marL="342900" indent="-342900">
+              <a:lnSpc>
+                <a:spcPts val="1620"/>
+              </a:lnSpc>
+              <a:spcAft>
+                <a:spcPts val="300"/>
+              </a:spcAft>
+              <a:buSzPct val="100000"/>
+              <a:buChar char="•"/>
+            </a:pPr>
+            <a:r>
+              <a:rPr lang="en-US" sz="1200" dirty="0">
+                <a:solidFill>
+                  <a:srgbClr val="1A1A1A"/>
+                </a:solidFill>
+                <a:latin typeface="Georgia" pitchFamily="34" charset="0"/>
+                <a:ea typeface="Georgia" pitchFamily="34" charset="-122"/>
+                <a:cs typeface="Georgia" pitchFamily="34" charset="-120"/>
+              </a:rPr>
+              <a:t>Convergence is a powerful pedagogical moment but DON'T oversell ("Ayurveda predicted everything").</a:t>
+            </a:r>
+            <a:endParaRPr lang="en-US" sz="1200" dirty="0"/>
+          </a:p>
+          <a:p>
+            <a:pPr algn="l" marL="342900" indent="-342900">
+              <a:lnSpc>
+                <a:spcPts val="1620"/>
+              </a:lnSpc>
+              <a:spcAft>
+                <a:spcPts val="300"/>
+              </a:spcAft>
+              <a:buSzPct val="100000"/>
+              <a:buChar char="•"/>
+            </a:pPr>
+            <a:r>
+              <a:rPr lang="en-US" sz="1200" dirty="0">
+                <a:solidFill>
+                  <a:srgbClr val="1A1A1A"/>
+                </a:solidFill>
+                <a:latin typeface="Georgia" pitchFamily="34" charset="0"/>
+                <a:ea typeface="Georgia" pitchFamily="34" charset="-122"/>
+                <a:cs typeface="Georgia" pitchFamily="34" charset="-120"/>
+              </a:rPr>
+              <a:t>The honest framing: tradition + science arrived at overlapping conclusions by different methods.</a:t>
+            </a:r>
+            <a:endParaRPr lang="en-US" sz="1200" dirty="0"/>
+          </a:p>
+        </p:txBody>
+      </p:sp>
+      <p:sp>
+        <p:nvSpPr>
+          <p:cNvPr id="5" name="Text 3"/>
+          <p:cNvSpPr/>
+          <p:nvPr/>
+        </p:nvSpPr>
+        <p:spPr>
+          <a:xfrm>
+            <a:off x="406301" y="4434929"/>
+            <a:ext cx="8498026" cy="213271"/>
+          </a:xfrm>
+          <a:prstGeom prst="rect">
+            <a:avLst/>
+          </a:prstGeom>
+          <a:noFill/>
+          <a:ln/>
+        </p:spPr>
+        <p:txBody>
+          <a:bodyPr wrap="square" lIns="0" tIns="0" rIns="0" bIns="0" rtlCol="0" anchor="t"/>
+          <a:lstStyle/>
+          <a:p>
+            <a:pPr algn="l" indent="0" marL="0">
+              <a:lnSpc>
+                <a:spcPts val="1680"/>
+              </a:lnSpc>
+              <a:spcBef>
+                <a:spcPts val="300"/>
+              </a:spcBef>
+              <a:spcAft>
+                <a:spcPts val="300"/>
+              </a:spcAft>
+              <a:buNone/>
+            </a:pPr>
+            <a:r>
+              <a:rPr lang="en-US" sz="1200" dirty="0">
+                <a:solidFill>
+                  <a:srgbClr val="1A1A1A"/>
+                </a:solidFill>
+                <a:latin typeface="Georgia" pitchFamily="34" charset="0"/>
+                <a:ea typeface="Georgia" pitchFamily="34" charset="-122"/>
+                <a:cs typeface="Georgia" pitchFamily="34" charset="-120"/>
+              </a:rPr>
+              <a:t>Senior ·  · IKS Curriculum</a:t>
+            </a:r>
+            <a:endParaRPr lang="en-US" sz="1200" dirty="0"/>
+          </a:p>
+        </p:txBody>
+      </p:sp>
+    </p:spTree>
+  </p:cSld>
+  <p:clrMapOvr>
+    <a:masterClrMapping/>
+  </p:clrMapOvr>
+</p:sld>
+</file>
+
+<file path=ppt/slides/slide14.xml><?xml version="1.0" encoding="utf-8"?>
+<p:sld xmlns:a="http://schemas.openxmlformats.org/drawingml/2006/main" xmlns:r="http://schemas.openxmlformats.org/officeDocument/2006/relationships" xmlns:p="http://schemas.openxmlformats.org/presentationml/2006/main">
+  <p:cSld name="Slide 14">
+    <p:bg>
+      <p:bgPr>
+        <a:solidFill>
+          <a:srgbClr val="FAF7F2"/>
+        </a:solidFill>
+      </p:bgPr>
+    </p:bg>
+    <p:spTree>
+      <p:nvGrpSpPr>
+        <p:cNvPr id="1" name=""/>
+        <p:cNvGrpSpPr/>
+        <p:nvPr/>
+      </p:nvGrpSpPr>
+      <p:grpSpPr>
+        <a:xfrm>
+          <a:off x="0" y="0"/>
+          <a:ext cx="0" cy="0"/>
+          <a:chOff x="0" y="0"/>
+          <a:chExt cx="0" cy="0"/>
+        </a:xfrm>
+      </p:grpSpPr>
+      <p:sp>
+        <p:nvSpPr>
+          <p:cNvPr id="2" name="Text 0"/>
+          <p:cNvSpPr/>
+          <p:nvPr/>
+        </p:nvSpPr>
+        <p:spPr>
+          <a:xfrm>
+            <a:off x="0" y="0"/>
+            <a:ext cx="9144000" cy="101501"/>
+          </a:xfrm>
+          <a:prstGeom prst="rect">
+            <a:avLst/>
+          </a:prstGeom>
+          <a:solidFill>
+            <a:srgbClr val="5D1D2E"/>
+          </a:solidFill>
+          <a:ln/>
+        </p:spPr>
+        <p:txBody>
+          <a:bodyPr wrap="square" rtlCol="0" anchor="ctr"/>
+          <a:lstStyle/>
+          <a:p>
+            <a:pPr indent="0" marL="0">
+              <a:buNone/>
+            </a:pPr>
+            <a:endParaRPr lang="en-US" dirty="0"/>
+          </a:p>
+        </p:txBody>
+      </p:sp>
+      <p:sp>
+        <p:nvSpPr>
+          <p:cNvPr id="3" name="Text 1"/>
+          <p:cNvSpPr/>
+          <p:nvPr/>
+        </p:nvSpPr>
+        <p:spPr>
+          <a:xfrm>
+            <a:off x="406301" y="457051"/>
+            <a:ext cx="8498026" cy="274290"/>
+          </a:xfrm>
+          <a:prstGeom prst="rect">
+            <a:avLst/>
+          </a:prstGeom>
+          <a:noFill/>
+          <a:ln/>
+        </p:spPr>
+        <p:txBody>
+          <a:bodyPr wrap="square" lIns="0" tIns="0" rIns="0" bIns="0" rtlCol="0" anchor="t"/>
+          <a:lstStyle/>
+          <a:p>
+            <a:pPr algn="l" indent="0" marL="0">
+              <a:lnSpc>
+                <a:spcPts val="2160"/>
+              </a:lnSpc>
+              <a:spcBef>
+                <a:spcPts val="600"/>
+              </a:spcBef>
+              <a:spcAft>
+                <a:spcPts val="800"/>
+              </a:spcAft>
+              <a:buNone/>
+            </a:pPr>
+            <a:r>
+              <a:rPr lang="en-US" sz="1800" b="1" dirty="0">
+                <a:solidFill>
+                  <a:srgbClr val="997929"/>
+                </a:solidFill>
+                <a:latin typeface="Times New Roman" pitchFamily="34" charset="0"/>
+                <a:ea typeface="Times New Roman" pitchFamily="34" charset="-122"/>
+                <a:cs typeface="Times New Roman" pitchFamily="34" charset="-120"/>
+              </a:rPr>
+              <a:t>Citation(s) used</a:t>
+            </a:r>
+            <a:endParaRPr lang="en-US" sz="1800" dirty="0"/>
+          </a:p>
+        </p:txBody>
+      </p:sp>
+      <p:sp>
+        <p:nvSpPr>
+          <p:cNvPr id="4" name="Text 2"/>
+          <p:cNvSpPr/>
+          <p:nvPr/>
+        </p:nvSpPr>
+        <p:spPr>
+          <a:xfrm>
+            <a:off x="634901" y="883593"/>
+            <a:ext cx="8102798" cy="769441"/>
+          </a:xfrm>
+          <a:prstGeom prst="rect">
+            <a:avLst/>
+          </a:prstGeom>
+          <a:noFill/>
+          <a:ln/>
+        </p:spPr>
+        <p:txBody>
+          <a:bodyPr wrap="square" lIns="0" tIns="0" rIns="0" bIns="0" rtlCol="0" anchor="t"/>
+          <a:lstStyle/>
+          <a:p>
+            <a:pPr algn="l" marL="342900" indent="-342900">
+              <a:lnSpc>
+                <a:spcPts val="1620"/>
+              </a:lnSpc>
+              <a:spcAft>
+                <a:spcPts val="300"/>
+              </a:spcAft>
+              <a:buSzPct val="100000"/>
+              <a:buChar char="•"/>
+            </a:pPr>
+            <a:r>
+              <a:rPr lang="en-US" sz="1200" dirty="0">
+                <a:solidFill>
+                  <a:srgbClr val="1A1A1A"/>
+                </a:solidFill>
+                <a:latin typeface="Georgia" pitchFamily="34" charset="0"/>
+                <a:ea typeface="Georgia" pitchFamily="34" charset="-122"/>
+                <a:cs typeface="Georgia" pitchFamily="34" charset="-120"/>
+              </a:rPr>
+              <a:t>BG 6.17 — vidya-karana RAG cache.</a:t>
+            </a:r>
+            <a:endParaRPr lang="en-US" sz="1200" dirty="0"/>
+          </a:p>
+          <a:p>
+            <a:pPr algn="l" marL="342900" indent="-342900">
+              <a:lnSpc>
+                <a:spcPts val="1620"/>
+              </a:lnSpc>
+              <a:spcAft>
+                <a:spcPts val="300"/>
+              </a:spcAft>
+              <a:buSzPct val="100000"/>
+              <a:buChar char="•"/>
+            </a:pPr>
+            <a:r>
+              <a:rPr lang="en-US" sz="1200" dirty="0">
+                <a:solidFill>
+                  <a:srgbClr val="1A1A1A"/>
+                </a:solidFill>
+                <a:latin typeface="Georgia" pitchFamily="34" charset="0"/>
+                <a:ea typeface="Georgia" pitchFamily="34" charset="-122"/>
+                <a:cs typeface="Georgia" pitchFamily="34" charset="-120"/>
+              </a:rPr>
+              <a:t>Bryant (2009).</a:t>
+            </a:r>
+            <a:endParaRPr lang="en-US" sz="1200" dirty="0"/>
+          </a:p>
+          <a:p>
+            <a:pPr algn="l" marL="342900" indent="-342900">
+              <a:lnSpc>
+                <a:spcPts val="1620"/>
+              </a:lnSpc>
+              <a:spcAft>
+                <a:spcPts val="300"/>
+              </a:spcAft>
+              <a:buSzPct val="100000"/>
+              <a:buChar char="•"/>
+            </a:pPr>
+            <a:r>
+              <a:rPr lang="en-US" sz="1200" dirty="0">
+                <a:solidFill>
+                  <a:srgbClr val="1A1A1A"/>
+                </a:solidFill>
+                <a:latin typeface="Georgia" pitchFamily="34" charset="0"/>
+                <a:ea typeface="Georgia" pitchFamily="34" charset="-122"/>
+                <a:cs typeface="Georgia" pitchFamily="34" charset="-120"/>
+              </a:rPr>
+              <a:t>Panda (2018), Walker (2017).</a:t>
             </a:r>
             <a:endParaRPr lang="en-US" sz="1200" dirty="0"/>
           </a:p>
@@ -2617,7 +3616,7 @@
                 <a:ea typeface="Times New Roman" pitchFamily="34" charset="-122"/>
                 <a:cs typeface="Times New Roman" pitchFamily="34" charset="-120"/>
               </a:rPr>
-              <a:t>Materials</a:t>
+              <a:t>Learning objective</a:t>
             </a:r>
             <a:endParaRPr lang="en-US" sz="1800" dirty="0"/>
           </a:p>
@@ -2632,7 +3631,7 @@
         <p:spPr>
           <a:xfrm>
             <a:off x="406301" y="870942"/>
-            <a:ext cx="8498026" cy="213271"/>
+            <a:ext cx="8498026" cy="426541"/>
           </a:xfrm>
           <a:prstGeom prst="rect">
             <a:avLst/>
@@ -2665,7 +3664,7 @@
                 <a:ea typeface="Georgia" pitchFamily="34" charset="-122"/>
                 <a:cs typeface="Georgia" pitchFamily="34" charset="-120"/>
               </a:rPr>
-              <a:t>– BG 6.17 handout (IAST + translation + Bryant commentary) – Panda (2018) extract on time-restricted eating</a:t>
+              <a:t>Students read BG 6.17 in IAST + translation and articulate the convergence between traditional dinacharya and modern lifestyle medicine.</a:t>
             </a:r>
             <a:endParaRPr lang="en-US" sz="1200" dirty="0"/>
           </a:p>
@@ -2823,7 +3822,7 @@
                 <a:ea typeface="Times New Roman" pitchFamily="34" charset="-122"/>
                 <a:cs typeface="Times New Roman" pitchFamily="34" charset="-120"/>
               </a:rPr>
-              <a:t>Flow</a:t>
+              <a:t>Materials</a:t>
             </a:r>
             <a:endParaRPr lang="en-US" sz="1800" dirty="0"/>
           </a:p>
@@ -2832,6 +3831,76 @@
       <p:sp>
         <p:nvSpPr>
           <p:cNvPr id="4" name="Text 2"/>
+          <p:cNvSpPr/>
+          <p:nvPr/>
+        </p:nvSpPr>
+        <p:spPr>
+          <a:xfrm>
+            <a:off x="634901" y="883593"/>
+            <a:ext cx="8102798" cy="525661"/>
+          </a:xfrm>
+          <a:prstGeom prst="rect">
+            <a:avLst/>
+          </a:prstGeom>
+          <a:noFill/>
+          <a:ln/>
+        </p:spPr>
+        <p:txBody>
+          <a:bodyPr wrap="square" lIns="0" tIns="0" rIns="0" bIns="0" rtlCol="0" anchor="t"/>
+          <a:lstStyle/>
+          <a:p>
+            <a:pPr algn="l" marL="342900" indent="-342900">
+              <a:lnSpc>
+                <a:spcPts val="1620"/>
+              </a:lnSpc>
+              <a:spcAft>
+                <a:spcPts val="300"/>
+              </a:spcAft>
+              <a:buSzPct val="100000"/>
+              <a:buChar char="•"/>
+            </a:pPr>
+            <a:r>
+              <a:rPr lang="en-US" sz="1200" dirty="0">
+                <a:solidFill>
+                  <a:srgbClr val="1A1A1A"/>
+                </a:solidFill>
+                <a:latin typeface="Georgia" pitchFamily="34" charset="0"/>
+                <a:ea typeface="Georgia" pitchFamily="34" charset="-122"/>
+                <a:cs typeface="Georgia" pitchFamily="34" charset="-120"/>
+              </a:rPr>
+              <a:t>BG 6.17 handout (IAST + translation + Bryant commentary)</a:t>
+            </a:r>
+            <a:endParaRPr lang="en-US" sz="1200" dirty="0"/>
+          </a:p>
+          <a:p>
+            <a:pPr algn="l" marL="342900" indent="-342900">
+              <a:lnSpc>
+                <a:spcPts val="1620"/>
+              </a:lnSpc>
+              <a:spcAft>
+                <a:spcPts val="300"/>
+              </a:spcAft>
+              <a:buSzPct val="100000"/>
+              <a:buChar char="•"/>
+            </a:pPr>
+            <a:r>
+              <a:rPr lang="en-US" sz="1200" dirty="0">
+                <a:solidFill>
+                  <a:srgbClr val="1A1A1A"/>
+                </a:solidFill>
+                <a:latin typeface="Georgia" pitchFamily="34" charset="0"/>
+                <a:ea typeface="Georgia" pitchFamily="34" charset="-122"/>
+                <a:cs typeface="Georgia" pitchFamily="34" charset="-120"/>
+              </a:rPr>
+              <a:t>Panda (2018) extract on time-restricted eating</a:t>
+            </a:r>
+            <a:endParaRPr lang="en-US" sz="1200" dirty="0"/>
+          </a:p>
+        </p:txBody>
+      </p:sp>
+      <p:sp>
+        <p:nvSpPr>
+          <p:cNvPr id="5" name="Text 3"/>
           <p:cNvSpPr/>
           <p:nvPr/>
         </p:nvSpPr>
@@ -2981,7 +4050,7 @@
                 <a:ea typeface="Times New Roman" pitchFamily="34" charset="-122"/>
                 <a:cs typeface="Times New Roman" pitchFamily="34" charset="-120"/>
               </a:rPr>
-              <a:t>Warm-up (5 min)</a:t>
+              <a:t>Flow</a:t>
             </a:r>
             <a:endParaRPr lang="en-US" sz="1800" dirty="0"/>
           </a:p>
@@ -2990,54 +4059,6 @@
       <p:sp>
         <p:nvSpPr>
           <p:cNvPr id="4" name="Text 2"/>
-          <p:cNvSpPr/>
-          <p:nvPr/>
-        </p:nvSpPr>
-        <p:spPr>
-          <a:xfrm>
-            <a:off x="406301" y="870942"/>
-            <a:ext cx="8498026" cy="213271"/>
-          </a:xfrm>
-          <a:prstGeom prst="rect">
-            <a:avLst/>
-          </a:prstGeom>
-          <a:noFill/>
-          <a:ln/>
-        </p:spPr>
-        <p:txBody>
-          <a:bodyPr wrap="square" lIns="0" tIns="0" rIns="0" bIns="0" rtlCol="0" anchor="t"/>
-          <a:lstStyle/>
-          <a:p>
-            <a:pPr algn="l" indent="0" marL="0">
-              <a:lnSpc>
-                <a:spcPts val="1680"/>
-              </a:lnSpc>
-              <a:spcBef>
-                <a:spcPts val="300"/>
-              </a:spcBef>
-              <a:spcAft>
-                <a:spcPts val="300"/>
-              </a:spcAft>
-              <a:buNone/>
-            </a:pPr>
-            <a:r>
-              <a:rPr lang="en-US" sz="1200" dirty="0">
-                <a:solidFill>
-                  <a:srgbClr val="1A1A1A"/>
-                </a:solidFill>
-                <a:latin typeface="Georgia" pitchFamily="34" charset="0"/>
-                <a:ea typeface="Georgia" pitchFamily="34" charset="-122"/>
-                <a:cs typeface="Georgia" pitchFamily="34" charset="-120"/>
-              </a:rPr>
-              <a:t>Recall: 5 dinacharya practices.</a:t>
-            </a:r>
-            <a:endParaRPr lang="en-US" sz="1200" dirty="0"/>
-          </a:p>
-        </p:txBody>
-      </p:sp>
-      <p:sp>
-        <p:nvSpPr>
-          <p:cNvPr id="5" name="Text 3"/>
           <p:cNvSpPr/>
           <p:nvPr/>
         </p:nvSpPr>
@@ -3187,7 +4208,7 @@
                 <a:ea typeface="Times New Roman" pitchFamily="34" charset="-122"/>
                 <a:cs typeface="Times New Roman" pitchFamily="34" charset="-120"/>
               </a:rPr>
-              <a:t>Reading (15 min)</a:t>
+              <a:t>Warm-up (5 min)</a:t>
             </a:r>
             <a:endParaRPr lang="en-US" sz="1800" dirty="0"/>
           </a:p>
@@ -3201,178 +4222,8 @@
         </p:nvSpPr>
         <p:spPr>
           <a:xfrm>
-            <a:off x="406301" y="883593"/>
-            <a:ext cx="8331398" cy="842963"/>
-          </a:xfrm>
-          <a:prstGeom prst="rect">
-            <a:avLst/>
-          </a:prstGeom>
-          <a:solidFill>
-            <a:srgbClr val="FFFFFF"/>
-          </a:solidFill>
-          <a:ln/>
-        </p:spPr>
-        <p:txBody>
-          <a:bodyPr wrap="square" rtlCol="0" anchor="ctr"/>
-          <a:lstStyle/>
-          <a:p>
-            <a:pPr indent="0" marL="0">
-              <a:buNone/>
-            </a:pPr>
-            <a:endParaRPr lang="en-US" dirty="0"/>
-          </a:p>
-        </p:txBody>
-      </p:sp>
-      <p:sp>
-        <p:nvSpPr>
-          <p:cNvPr id="5" name="Shape 3"/>
-          <p:cNvSpPr/>
-          <p:nvPr/>
-        </p:nvSpPr>
-        <p:spPr>
-          <a:xfrm>
-            <a:off x="434876" y="883593"/>
-            <a:ext cx="0" cy="842963"/>
-          </a:xfrm>
-          <a:prstGeom prst="line">
-            <a:avLst/>
-          </a:prstGeom>
-          <a:noFill/>
-          <a:ln w="57150">
-            <a:solidFill>
-              <a:srgbClr val="997929"/>
-            </a:solidFill>
-            <a:prstDash val="solid"/>
-          </a:ln>
-        </p:spPr>
-      </p:sp>
-      <p:sp>
-        <p:nvSpPr>
-          <p:cNvPr id="6" name="Text 4"/>
-          <p:cNvSpPr/>
-          <p:nvPr/>
-        </p:nvSpPr>
-        <p:spPr>
-          <a:xfrm>
-            <a:off x="692051" y="1074093"/>
-            <a:ext cx="7973389" cy="461963"/>
-          </a:xfrm>
-          <a:prstGeom prst="rect">
-            <a:avLst/>
-          </a:prstGeom>
-          <a:noFill/>
-          <a:ln/>
-        </p:spPr>
-        <p:txBody>
-          <a:bodyPr wrap="square" lIns="0" tIns="0" rIns="0" bIns="0" rtlCol="0" anchor="t"/>
-          <a:lstStyle/>
-          <a:p>
-            <a:pPr algn="l" indent="0" marL="0">
-              <a:lnSpc>
-                <a:spcPts val="1820"/>
-              </a:lnSpc>
-              <a:spcBef>
-                <a:spcPts val="300"/>
-              </a:spcBef>
-              <a:spcAft>
-                <a:spcPts val="300"/>
-              </a:spcAft>
-              <a:buNone/>
-            </a:pPr>
-            <a:r>
-              <a:rPr lang="en-US" sz="1300" i="1" dirty="0">
-                <a:solidFill>
-                  <a:srgbClr val="1A1A1A"/>
-                </a:solidFill>
-                <a:latin typeface="Times New Roman" pitchFamily="34" charset="0"/>
-                <a:ea typeface="Times New Roman" pitchFamily="34" charset="-122"/>
-                <a:cs typeface="Times New Roman" pitchFamily="34" charset="-120"/>
-              </a:rPr>
-              <a:t>yuktāhāra-vihārasya yukta-ceṣṭasya karmasu</a:t>
-            </a:r>
-            <a:pPr algn="l" indent="0" marL="0">
-              <a:lnSpc>
-                <a:spcPts val="1820"/>
-              </a:lnSpc>
-              <a:spcBef>
-                <a:spcPts val="300"/>
-              </a:spcBef>
-              <a:spcAft>
-                <a:spcPts val="300"/>
-              </a:spcAft>
-              <a:buNone/>
-            </a:pPr>
-            <a:r>
-              <a:rPr lang="en-US" sz="1300" dirty="0">
-                <a:solidFill>
-                  <a:srgbClr val="1A1A1A"/>
-                </a:solidFill>
-                <a:latin typeface="Times New Roman" pitchFamily="34" charset="0"/>
-                <a:ea typeface="Times New Roman" pitchFamily="34" charset="-122"/>
-                <a:cs typeface="Times New Roman" pitchFamily="34" charset="-120"/>
-              </a:rPr>
-              <a:t> </a:t>
-            </a:r>
-            <a:pPr algn="l" indent="0" marL="0">
-              <a:lnSpc>
-                <a:spcPts val="1820"/>
-              </a:lnSpc>
-              <a:spcBef>
-                <a:spcPts val="300"/>
-              </a:spcBef>
-              <a:spcAft>
-                <a:spcPts val="300"/>
-              </a:spcAft>
-              <a:buNone/>
-            </a:pPr>
-            <a:r>
-              <a:rPr lang="en-US" sz="1300" i="1" dirty="0">
-                <a:solidFill>
-                  <a:srgbClr val="1A1A1A"/>
-                </a:solidFill>
-                <a:latin typeface="Times New Roman" pitchFamily="34" charset="0"/>
-                <a:ea typeface="Times New Roman" pitchFamily="34" charset="-122"/>
-                <a:cs typeface="Times New Roman" pitchFamily="34" charset="-120"/>
-              </a:rPr>
-              <a:t>yukta-svapnāvabodhasya yogo bhavati duḥkha-hā</a:t>
-            </a:r>
-            <a:pPr algn="l" indent="0" marL="0">
-              <a:lnSpc>
-                <a:spcPts val="1820"/>
-              </a:lnSpc>
-              <a:spcBef>
-                <a:spcPts val="300"/>
-              </a:spcBef>
-              <a:spcAft>
-                <a:spcPts val="300"/>
-              </a:spcAft>
-              <a:buNone/>
-            </a:pPr>
-            <a:r>
-              <a:rPr lang="en-US" sz="1300" dirty="0">
-                <a:solidFill>
-                  <a:srgbClr val="1A1A1A"/>
-                </a:solidFill>
-                <a:latin typeface="Times New Roman" pitchFamily="34" charset="0"/>
-                <a:ea typeface="Times New Roman" pitchFamily="34" charset="-122"/>
-                <a:cs typeface="Times New Roman" pitchFamily="34" charset="-120"/>
-              </a:rPr>
-              <a:t> — Bhagavad-gītā 6.17</a:t>
-            </a:r>
-            <a:endParaRPr lang="en-US" sz="1300" dirty="0"/>
-          </a:p>
-        </p:txBody>
-      </p:sp>
-      <p:sp>
-        <p:nvSpPr>
-          <p:cNvPr id="7" name="Text 5"/>
-          <p:cNvSpPr/>
-          <p:nvPr/>
-        </p:nvSpPr>
-        <p:spPr>
-          <a:xfrm>
-            <a:off x="406301" y="1815405"/>
-            <a:ext cx="8498026" cy="445591"/>
+            <a:off x="406301" y="870942"/>
+            <a:ext cx="8498026" cy="213271"/>
           </a:xfrm>
           <a:prstGeom prst="rect">
             <a:avLst/>
@@ -3405,53 +4256,7 @@
                 <a:ea typeface="Georgia" pitchFamily="34" charset="-122"/>
                 <a:cs typeface="Georgia" pitchFamily="34" charset="-120"/>
               </a:rPr>
-              <a:t>Word-by-word + translation (as in Middle Day 7 — see also </a:t>
-            </a:r>
-            <a:pPr algn="l" indent="0" marL="0">
-              <a:lnSpc>
-                <a:spcPts val="1680"/>
-              </a:lnSpc>
-              <a:spcBef>
-                <a:spcPts val="300"/>
-              </a:spcBef>
-              <a:spcAft>
-                <a:spcPts val="300"/>
-              </a:spcAft>
-              <a:buNone/>
-            </a:pPr>
-            <a:r>
-              <a:rPr lang="en-US" sz="1200" dirty="0">
-                <a:solidFill>
-                  <a:srgbClr val="1A1A1A"/>
-                </a:solidFill>
-                <a:latin typeface="Georgia" pitchFamily="34" charset="0"/>
-                <a:ea typeface="Georgia" pitchFamily="34" charset="-122"/>
-                <a:cs typeface="Georgia" pitchFamily="34" charset="-120"/>
-              </a:rPr>
-              <a:t>curriculum/middle/module-03-ayurveda-good-health/days/day-07-primary-source.md</a:t>
-            </a:r>
-            <a:pPr algn="l" indent="0" marL="0">
-              <a:lnSpc>
-                <a:spcPts val="1680"/>
-              </a:lnSpc>
-              <a:spcBef>
-                <a:spcPts val="300"/>
-              </a:spcBef>
-              <a:spcAft>
-                <a:spcPts val="300"/>
-              </a:spcAft>
-              <a:buNone/>
-            </a:pPr>
-            <a:r>
-              <a:rPr lang="en-US" sz="1200" dirty="0">
-                <a:solidFill>
-                  <a:srgbClr val="1A1A1A"/>
-                </a:solidFill>
-                <a:latin typeface="Georgia" pitchFamily="34" charset="0"/>
-                <a:ea typeface="Georgia" pitchFamily="34" charset="-122"/>
-                <a:cs typeface="Georgia" pitchFamily="34" charset="-120"/>
-              </a:rPr>
-              <a:t>).</a:t>
+              <a:t>Recall: 5 dinacharya practices.</a:t>
             </a:r>
             <a:endParaRPr lang="en-US" sz="1200" dirty="0"/>
           </a:p>
@@ -3459,7 +4264,7 @@
       </p:sp>
       <p:sp>
         <p:nvSpPr>
-          <p:cNvPr id="8" name="Text 6"/>
+          <p:cNvPr id="5" name="Text 3"/>
           <p:cNvSpPr/>
           <p:nvPr/>
         </p:nvSpPr>
@@ -3609,7 +4414,7 @@
                 <a:ea typeface="Times New Roman" pitchFamily="34" charset="-122"/>
                 <a:cs typeface="Times New Roman" pitchFamily="34" charset="-120"/>
               </a:rPr>
-              <a:t>The convergence (15 min)</a:t>
+              <a:t>Reading (15 min)</a:t>
             </a:r>
             <a:endParaRPr lang="en-US" sz="1800" dirty="0"/>
           </a:p>
@@ -3623,8 +4428,178 @@
         </p:nvSpPr>
         <p:spPr>
           <a:xfrm>
-            <a:off x="406301" y="870942"/>
-            <a:ext cx="8498026" cy="213271"/>
+            <a:off x="406301" y="883593"/>
+            <a:ext cx="8331398" cy="842963"/>
+          </a:xfrm>
+          <a:prstGeom prst="rect">
+            <a:avLst/>
+          </a:prstGeom>
+          <a:solidFill>
+            <a:srgbClr val="FFFFFF"/>
+          </a:solidFill>
+          <a:ln/>
+        </p:spPr>
+        <p:txBody>
+          <a:bodyPr wrap="square" rtlCol="0" anchor="ctr"/>
+          <a:lstStyle/>
+          <a:p>
+            <a:pPr indent="0" marL="0">
+              <a:buNone/>
+            </a:pPr>
+            <a:endParaRPr lang="en-US" dirty="0"/>
+          </a:p>
+        </p:txBody>
+      </p:sp>
+      <p:sp>
+        <p:nvSpPr>
+          <p:cNvPr id="5" name="Shape 3"/>
+          <p:cNvSpPr/>
+          <p:nvPr/>
+        </p:nvSpPr>
+        <p:spPr>
+          <a:xfrm>
+            <a:off x="434876" y="883593"/>
+            <a:ext cx="0" cy="842963"/>
+          </a:xfrm>
+          <a:prstGeom prst="line">
+            <a:avLst/>
+          </a:prstGeom>
+          <a:noFill/>
+          <a:ln w="57150">
+            <a:solidFill>
+              <a:srgbClr val="997929"/>
+            </a:solidFill>
+            <a:prstDash val="solid"/>
+          </a:ln>
+        </p:spPr>
+      </p:sp>
+      <p:sp>
+        <p:nvSpPr>
+          <p:cNvPr id="6" name="Text 4"/>
+          <p:cNvSpPr/>
+          <p:nvPr/>
+        </p:nvSpPr>
+        <p:spPr>
+          <a:xfrm>
+            <a:off x="692051" y="1074093"/>
+            <a:ext cx="7973389" cy="461963"/>
+          </a:xfrm>
+          <a:prstGeom prst="rect">
+            <a:avLst/>
+          </a:prstGeom>
+          <a:noFill/>
+          <a:ln/>
+        </p:spPr>
+        <p:txBody>
+          <a:bodyPr wrap="square" lIns="0" tIns="0" rIns="0" bIns="0" rtlCol="0" anchor="t"/>
+          <a:lstStyle/>
+          <a:p>
+            <a:pPr algn="l" indent="0" marL="0">
+              <a:lnSpc>
+                <a:spcPts val="1820"/>
+              </a:lnSpc>
+              <a:spcBef>
+                <a:spcPts val="300"/>
+              </a:spcBef>
+              <a:spcAft>
+                <a:spcPts val="300"/>
+              </a:spcAft>
+              <a:buNone/>
+            </a:pPr>
+            <a:r>
+              <a:rPr lang="en-US" sz="1300" i="1" dirty="0">
+                <a:solidFill>
+                  <a:srgbClr val="1A1A1A"/>
+                </a:solidFill>
+                <a:latin typeface="Times New Roman" pitchFamily="34" charset="0"/>
+                <a:ea typeface="Times New Roman" pitchFamily="34" charset="-122"/>
+                <a:cs typeface="Times New Roman" pitchFamily="34" charset="-120"/>
+              </a:rPr>
+              <a:t>yuktāhāra-vihārasya yukta-ceṣṭasya karmasu</a:t>
+            </a:r>
+            <a:pPr algn="l" indent="0" marL="0">
+              <a:lnSpc>
+                <a:spcPts val="1820"/>
+              </a:lnSpc>
+              <a:spcBef>
+                <a:spcPts val="300"/>
+              </a:spcBef>
+              <a:spcAft>
+                <a:spcPts val="300"/>
+              </a:spcAft>
+              <a:buNone/>
+            </a:pPr>
+            <a:r>
+              <a:rPr lang="en-US" sz="1300" dirty="0">
+                <a:solidFill>
+                  <a:srgbClr val="1A1A1A"/>
+                </a:solidFill>
+                <a:latin typeface="Times New Roman" pitchFamily="34" charset="0"/>
+                <a:ea typeface="Times New Roman" pitchFamily="34" charset="-122"/>
+                <a:cs typeface="Times New Roman" pitchFamily="34" charset="-120"/>
+              </a:rPr>
+              <a:t> </a:t>
+            </a:r>
+            <a:pPr algn="l" indent="0" marL="0">
+              <a:lnSpc>
+                <a:spcPts val="1820"/>
+              </a:lnSpc>
+              <a:spcBef>
+                <a:spcPts val="300"/>
+              </a:spcBef>
+              <a:spcAft>
+                <a:spcPts val="300"/>
+              </a:spcAft>
+              <a:buNone/>
+            </a:pPr>
+            <a:r>
+              <a:rPr lang="en-US" sz="1300" i="1" dirty="0">
+                <a:solidFill>
+                  <a:srgbClr val="1A1A1A"/>
+                </a:solidFill>
+                <a:latin typeface="Times New Roman" pitchFamily="34" charset="0"/>
+                <a:ea typeface="Times New Roman" pitchFamily="34" charset="-122"/>
+                <a:cs typeface="Times New Roman" pitchFamily="34" charset="-120"/>
+              </a:rPr>
+              <a:t>yukta-svapnāvabodhasya yogo bhavati duḥkha-hā</a:t>
+            </a:r>
+            <a:pPr algn="l" indent="0" marL="0">
+              <a:lnSpc>
+                <a:spcPts val="1820"/>
+              </a:lnSpc>
+              <a:spcBef>
+                <a:spcPts val="300"/>
+              </a:spcBef>
+              <a:spcAft>
+                <a:spcPts val="300"/>
+              </a:spcAft>
+              <a:buNone/>
+            </a:pPr>
+            <a:r>
+              <a:rPr lang="en-US" sz="1300" dirty="0">
+                <a:solidFill>
+                  <a:srgbClr val="1A1A1A"/>
+                </a:solidFill>
+                <a:latin typeface="Times New Roman" pitchFamily="34" charset="0"/>
+                <a:ea typeface="Times New Roman" pitchFamily="34" charset="-122"/>
+                <a:cs typeface="Times New Roman" pitchFamily="34" charset="-120"/>
+              </a:rPr>
+              <a:t> — Bhagavad-gītā 6.17</a:t>
+            </a:r>
+            <a:endParaRPr lang="en-US" sz="1300" dirty="0"/>
+          </a:p>
+        </p:txBody>
+      </p:sp>
+      <p:sp>
+        <p:nvSpPr>
+          <p:cNvPr id="7" name="Text 5"/>
+          <p:cNvSpPr/>
+          <p:nvPr/>
+        </p:nvSpPr>
+        <p:spPr>
+          <a:xfrm>
+            <a:off x="406301" y="1815405"/>
+            <a:ext cx="8498026" cy="445591"/>
           </a:xfrm>
           <a:prstGeom prst="rect">
             <a:avLst/>
@@ -3657,33 +4632,8 @@
                 <a:ea typeface="Georgia" pitchFamily="34" charset="-122"/>
                 <a:cs typeface="Georgia" pitchFamily="34" charset="-120"/>
               </a:rPr>
-              <a:t>Build comparison table:</a:t>
-            </a:r>
-            <a:endParaRPr lang="en-US" sz="1200" dirty="0"/>
-          </a:p>
-        </p:txBody>
-      </p:sp>
-      <p:sp>
-        <p:nvSpPr>
-          <p:cNvPr id="5" name="Text 3"/>
-          <p:cNvSpPr/>
-          <p:nvPr/>
-        </p:nvSpPr>
-        <p:spPr>
-          <a:xfrm>
-            <a:off x="406301" y="1160413"/>
-            <a:ext cx="8498026" cy="213271"/>
-          </a:xfrm>
-          <a:prstGeom prst="rect">
-            <a:avLst/>
-          </a:prstGeom>
-          <a:noFill/>
-          <a:ln/>
-        </p:spPr>
-        <p:txBody>
-          <a:bodyPr wrap="square" lIns="0" tIns="0" rIns="0" bIns="0" rtlCol="0" anchor="t"/>
-          <a:lstStyle/>
-          <a:p>
+              <a:t>Word-by-word + translation (as in Middle Day 7 — see also </a:t>
+            </a:r>
             <a:pPr algn="l" indent="0" marL="0">
               <a:lnSpc>
                 <a:spcPts val="1680"/>
@@ -3697,7 +4647,7 @@
               <a:buNone/>
             </a:pPr>
             <a:r>
-              <a:rPr lang="en-US" sz="1200" i="1" dirty="0">
+              <a:rPr lang="en-US" sz="1200" dirty="0">
                 <a:solidFill>
                   <a:srgbClr val="1A1A1A"/>
                 </a:solidFill>
@@ -3705,45 +4655,22 @@
                 <a:ea typeface="Georgia" pitchFamily="34" charset="-122"/>
                 <a:cs typeface="Georgia" pitchFamily="34" charset="-120"/>
               </a:rPr>
-              <a:t>Each row: Traditional principle (Caraka, BG) · Modern lifestyle medicine equivalent · Evidence.</a:t>
-            </a:r>
-            <a:endParaRPr lang="en-US" sz="1200" dirty="0"/>
-          </a:p>
-        </p:txBody>
-      </p:sp>
-      <p:sp>
-        <p:nvSpPr>
-          <p:cNvPr id="6" name="Text 4"/>
-          <p:cNvSpPr/>
-          <p:nvPr/>
-        </p:nvSpPr>
-        <p:spPr>
-          <a:xfrm>
-            <a:off x="634901" y="1462534"/>
-            <a:ext cx="8102798" cy="1257002"/>
-          </a:xfrm>
-          <a:prstGeom prst="rect">
-            <a:avLst/>
-          </a:prstGeom>
-          <a:noFill/>
-          <a:ln/>
-        </p:spPr>
-        <p:txBody>
-          <a:bodyPr wrap="square" lIns="0" tIns="0" rIns="0" bIns="0" rtlCol="0" anchor="t"/>
-          <a:lstStyle/>
-          <a:p>
-            <a:pPr algn="l" marL="342900" indent="-342900">
-              <a:lnSpc>
-                <a:spcPts val="1620"/>
-              </a:lnSpc>
-              <a:spcAft>
-                <a:spcPts val="300"/>
-              </a:spcAft>
-              <a:buSzPct val="100000"/>
-              <a:buChar char="•"/>
-            </a:pPr>
-            <a:r>
-              <a:rPr lang="en-US" sz="1200" b="1" dirty="0">
+              <a:t>curriculum/middle/module-03-ayurveda-good-health/days/day-07-primary-source.md</a:t>
+            </a:r>
+            <a:pPr algn="l" indent="0" marL="0">
+              <a:lnSpc>
+                <a:spcPts val="1680"/>
+              </a:lnSpc>
+              <a:spcBef>
+                <a:spcPts val="300"/>
+              </a:spcBef>
+              <a:spcAft>
+                <a:spcPts val="300"/>
+              </a:spcAft>
+              <a:buNone/>
+            </a:pPr>
+            <a:r>
+              <a:rPr lang="en-US" sz="1200" dirty="0">
                 <a:solidFill>
                   <a:srgbClr val="1A1A1A"/>
                 </a:solidFill>
@@ -3751,274 +4678,7 @@
                 <a:ea typeface="Georgia" pitchFamily="34" charset="-122"/>
                 <a:cs typeface="Georgia" pitchFamily="34" charset="-120"/>
               </a:rPr>
-              <a:t>Wake before sunrise</a:t>
-            </a:r>
-            <a:pPr algn="l" indent="0" marL="0">
-              <a:lnSpc>
-                <a:spcPts val="1620"/>
-              </a:lnSpc>
-              <a:spcAft>
-                <a:spcPts val="300"/>
-              </a:spcAft>
-              <a:buNone/>
-            </a:pPr>
-            <a:r>
-              <a:rPr lang="en-US" sz="1200" dirty="0">
-                <a:solidFill>
-                  <a:srgbClr val="1A1A1A"/>
-                </a:solidFill>
-                <a:latin typeface="Georgia" pitchFamily="34" charset="0"/>
-                <a:ea typeface="Georgia" pitchFamily="34" charset="-122"/>
-                <a:cs typeface="Georgia" pitchFamily="34" charset="-120"/>
-              </a:rPr>
-              <a:t> — Aligning with circadian rhythm · Nobel 2017 — circadian biology</a:t>
-            </a:r>
-            <a:endParaRPr lang="en-US" sz="1200" dirty="0"/>
-          </a:p>
-          <a:p>
-            <a:pPr algn="l" marL="342900" indent="-342900">
-              <a:lnSpc>
-                <a:spcPts val="1620"/>
-              </a:lnSpc>
-              <a:spcAft>
-                <a:spcPts val="300"/>
-              </a:spcAft>
-              <a:buSzPct val="100000"/>
-              <a:buChar char="•"/>
-            </a:pPr>
-            <a:r>
-              <a:rPr lang="en-US" sz="1200" b="1" dirty="0">
-                <a:solidFill>
-                  <a:srgbClr val="1A1A1A"/>
-                </a:solidFill>
-                <a:latin typeface="Georgia" pitchFamily="34" charset="0"/>
-                <a:ea typeface="Georgia" pitchFamily="34" charset="-122"/>
-                <a:cs typeface="Georgia" pitchFamily="34" charset="-120"/>
-              </a:rPr>
-              <a:t>Largest meal midday (Pitta peak)</a:t>
-            </a:r>
-            <a:pPr algn="l" indent="0" marL="0">
-              <a:lnSpc>
-                <a:spcPts val="1620"/>
-              </a:lnSpc>
-              <a:spcAft>
-                <a:spcPts val="300"/>
-              </a:spcAft>
-              <a:buNone/>
-            </a:pPr>
-            <a:r>
-              <a:rPr lang="en-US" sz="1200" dirty="0">
-                <a:solidFill>
-                  <a:srgbClr val="1A1A1A"/>
-                </a:solidFill>
-                <a:latin typeface="Georgia" pitchFamily="34" charset="0"/>
-                <a:ea typeface="Georgia" pitchFamily="34" charset="-122"/>
-                <a:cs typeface="Georgia" pitchFamily="34" charset="-120"/>
-              </a:rPr>
-              <a:t> — Time-restricted eating; metabolic window · Panda et al. (2018)</a:t>
-            </a:r>
-            <a:endParaRPr lang="en-US" sz="1200" dirty="0"/>
-          </a:p>
-          <a:p>
-            <a:pPr algn="l" marL="342900" indent="-342900">
-              <a:lnSpc>
-                <a:spcPts val="1620"/>
-              </a:lnSpc>
-              <a:spcAft>
-                <a:spcPts val="300"/>
-              </a:spcAft>
-              <a:buSzPct val="100000"/>
-              <a:buChar char="•"/>
-            </a:pPr>
-            <a:r>
-              <a:rPr lang="en-US" sz="1200" b="1" dirty="0">
-                <a:solidFill>
-                  <a:srgbClr val="1A1A1A"/>
-                </a:solidFill>
-                <a:latin typeface="Georgia" pitchFamily="34" charset="0"/>
-                <a:ea typeface="Georgia" pitchFamily="34" charset="-122"/>
-                <a:cs typeface="Georgia" pitchFamily="34" charset="-120"/>
-              </a:rPr>
-              <a:t>Sleep by ~10pm</a:t>
-            </a:r>
-            <a:pPr algn="l" indent="0" marL="0">
-              <a:lnSpc>
-                <a:spcPts val="1620"/>
-              </a:lnSpc>
-              <a:spcAft>
-                <a:spcPts val="300"/>
-              </a:spcAft>
-              <a:buNone/>
-            </a:pPr>
-            <a:r>
-              <a:rPr lang="en-US" sz="1200" dirty="0">
-                <a:solidFill>
-                  <a:srgbClr val="1A1A1A"/>
-                </a:solidFill>
-                <a:latin typeface="Georgia" pitchFamily="34" charset="0"/>
-                <a:ea typeface="Georgia" pitchFamily="34" charset="-122"/>
-                <a:cs typeface="Georgia" pitchFamily="34" charset="-120"/>
-              </a:rPr>
-              <a:t> — Aligning with melatonin curve · Sleep science (Walker 2017)</a:t>
-            </a:r>
-            <a:endParaRPr lang="en-US" sz="1200" dirty="0"/>
-          </a:p>
-          <a:p>
-            <a:pPr algn="l" marL="342900" indent="-342900">
-              <a:lnSpc>
-                <a:spcPts val="1620"/>
-              </a:lnSpc>
-              <a:spcAft>
-                <a:spcPts val="300"/>
-              </a:spcAft>
-              <a:buSzPct val="100000"/>
-              <a:buChar char="•"/>
-            </a:pPr>
-            <a:r>
-              <a:rPr lang="en-US" sz="1200" b="1" dirty="0">
-                <a:solidFill>
-                  <a:srgbClr val="1A1A1A"/>
-                </a:solidFill>
-                <a:latin typeface="Georgia" pitchFamily="34" charset="0"/>
-                <a:ea typeface="Georgia" pitchFamily="34" charset="-122"/>
-                <a:cs typeface="Georgia" pitchFamily="34" charset="-120"/>
-              </a:rPr>
-              <a:t>Regular exercise to 50% capacity</a:t>
-            </a:r>
-            <a:pPr algn="l" indent="0" marL="0">
-              <a:lnSpc>
-                <a:spcPts val="1620"/>
-              </a:lnSpc>
-              <a:spcAft>
-                <a:spcPts val="300"/>
-              </a:spcAft>
-              <a:buNone/>
-            </a:pPr>
-            <a:r>
-              <a:rPr lang="en-US" sz="1200" dirty="0">
-                <a:solidFill>
-                  <a:srgbClr val="1A1A1A"/>
-                </a:solidFill>
-                <a:latin typeface="Georgia" pitchFamily="34" charset="0"/>
-                <a:ea typeface="Georgia" pitchFamily="34" charset="-122"/>
-                <a:cs typeface="Georgia" pitchFamily="34" charset="-120"/>
-              </a:rPr>
-              <a:t> — Moderate-intensity training · Standard exercise physiology</a:t>
-            </a:r>
-            <a:endParaRPr lang="en-US" sz="1200" dirty="0"/>
-          </a:p>
-          <a:p>
-            <a:pPr algn="l" marL="342900" indent="-342900">
-              <a:lnSpc>
-                <a:spcPts val="1620"/>
-              </a:lnSpc>
-              <a:spcAft>
-                <a:spcPts val="300"/>
-              </a:spcAft>
-              <a:buSzPct val="100000"/>
-              <a:buChar char="•"/>
-            </a:pPr>
-            <a:r>
-              <a:rPr lang="en-US" sz="1200" b="1" dirty="0">
-                <a:solidFill>
-                  <a:srgbClr val="1A1A1A"/>
-                </a:solidFill>
-                <a:latin typeface="Georgia" pitchFamily="34" charset="0"/>
-                <a:ea typeface="Georgia" pitchFamily="34" charset="-122"/>
-                <a:cs typeface="Georgia" pitchFamily="34" charset="-120"/>
-              </a:rPr>
-              <a:t>Six tastes per meal</a:t>
-            </a:r>
-            <a:pPr algn="l" indent="0" marL="0">
-              <a:lnSpc>
-                <a:spcPts val="1620"/>
-              </a:lnSpc>
-              <a:spcAft>
-                <a:spcPts val="300"/>
-              </a:spcAft>
-              <a:buNone/>
-            </a:pPr>
-            <a:r>
-              <a:rPr lang="en-US" sz="1200" dirty="0">
-                <a:solidFill>
-                  <a:srgbClr val="1A1A1A"/>
-                </a:solidFill>
-                <a:latin typeface="Georgia" pitchFamily="34" charset="0"/>
-                <a:ea typeface="Georgia" pitchFamily="34" charset="-122"/>
-                <a:cs typeface="Georgia" pitchFamily="34" charset="-120"/>
-              </a:rPr>
-              <a:t> — Macronutrient diversity, polyphenol intake · Nutrition science</a:t>
-            </a:r>
-            <a:endParaRPr lang="en-US" sz="1200" dirty="0"/>
-          </a:p>
-        </p:txBody>
-      </p:sp>
-      <p:sp>
-        <p:nvSpPr>
-          <p:cNvPr id="7" name="Text 5"/>
-          <p:cNvSpPr/>
-          <p:nvPr/>
-        </p:nvSpPr>
-        <p:spPr>
-          <a:xfrm>
-            <a:off x="406301" y="2808387"/>
-            <a:ext cx="8498026" cy="426541"/>
-          </a:xfrm>
-          <a:prstGeom prst="rect">
-            <a:avLst/>
-          </a:prstGeom>
-          <a:noFill/>
-          <a:ln/>
-        </p:spPr>
-        <p:txBody>
-          <a:bodyPr wrap="square" lIns="0" tIns="0" rIns="0" bIns="0" rtlCol="0" anchor="t"/>
-          <a:lstStyle/>
-          <a:p>
-            <a:pPr algn="l" indent="0" marL="0">
-              <a:lnSpc>
-                <a:spcPts val="1680"/>
-              </a:lnSpc>
-              <a:spcBef>
-                <a:spcPts val="300"/>
-              </a:spcBef>
-              <a:spcAft>
-                <a:spcPts val="300"/>
-              </a:spcAft>
-              <a:buNone/>
-            </a:pPr>
-            <a:r>
-              <a:rPr lang="en-US" sz="1200" b="1" dirty="0">
-                <a:solidFill>
-                  <a:srgbClr val="1A1A1A"/>
-                </a:solidFill>
-                <a:latin typeface="Georgia" pitchFamily="34" charset="0"/>
-                <a:ea typeface="Georgia" pitchFamily="34" charset="-122"/>
-                <a:cs typeface="Georgia" pitchFamily="34" charset="-120"/>
-              </a:rPr>
-              <a:t>Note the convergence is striking but not identical.</a:t>
-            </a:r>
-            <a:pPr algn="l" indent="0" marL="0">
-              <a:lnSpc>
-                <a:spcPts val="1680"/>
-              </a:lnSpc>
-              <a:spcBef>
-                <a:spcPts val="300"/>
-              </a:spcBef>
-              <a:spcAft>
-                <a:spcPts val="300"/>
-              </a:spcAft>
-              <a:buNone/>
-            </a:pPr>
-            <a:r>
-              <a:rPr lang="en-US" sz="1200" dirty="0">
-                <a:solidFill>
-                  <a:srgbClr val="1A1A1A"/>
-                </a:solidFill>
-                <a:latin typeface="Georgia" pitchFamily="34" charset="0"/>
-                <a:ea typeface="Georgia" pitchFamily="34" charset="-122"/>
-                <a:cs typeface="Georgia" pitchFamily="34" charset="-120"/>
-              </a:rPr>
-              <a:t> The tradition observed; modern science measures. They overlap in many places; they're not the same project.</a:t>
+              <a:t>).</a:t>
             </a:r>
             <a:endParaRPr lang="en-US" sz="1200" dirty="0"/>
           </a:p>
@@ -4176,7 +4836,7 @@
                 <a:ea typeface="Times New Roman" pitchFamily="34" charset="-122"/>
                 <a:cs typeface="Times New Roman" pitchFamily="34" charset="-120"/>
               </a:rPr>
-              <a:t>Discussion (8 min)</a:t>
+              <a:t>The convergence (15 min)</a:t>
             </a:r>
             <a:endParaRPr lang="en-US" sz="1800" dirty="0"/>
           </a:p>
@@ -4190,8 +4850,8 @@
         </p:nvSpPr>
         <p:spPr>
           <a:xfrm>
-            <a:off x="634901" y="883593"/>
-            <a:ext cx="8102798" cy="281880"/>
+            <a:off x="406301" y="870942"/>
+            <a:ext cx="8498026" cy="213271"/>
           </a:xfrm>
           <a:prstGeom prst="rect">
             <a:avLst/>
@@ -4203,18 +4863,20 @@
           <a:bodyPr wrap="square" lIns="0" tIns="0" rIns="0" bIns="0" rtlCol="0" anchor="t"/>
           <a:lstStyle/>
           <a:p>
-            <a:pPr algn="l" marL="342900" indent="-342900">
-              <a:lnSpc>
-                <a:spcPts val="1620"/>
-              </a:lnSpc>
-              <a:spcAft>
-                <a:spcPts val="300"/>
-              </a:spcAft>
-              <a:buSzPct val="100000"/>
-              <a:buChar char="•"/>
-            </a:pPr>
-            <a:r>
-              <a:rPr lang="en-US" sz="1200" i="1" dirty="0">
+            <a:pPr algn="l" indent="0" marL="0">
+              <a:lnSpc>
+                <a:spcPts val="1680"/>
+              </a:lnSpc>
+              <a:spcBef>
+                <a:spcPts val="300"/>
+              </a:spcBef>
+              <a:spcAft>
+                <a:spcPts val="300"/>
+              </a:spcAft>
+              <a:buNone/>
+            </a:pPr>
+            <a:r>
+              <a:rPr lang="en-US" sz="1200" dirty="0">
                 <a:solidFill>
                   <a:srgbClr val="1A1A1A"/>
                 </a:solidFill>
@@ -4222,7 +4884,7 @@
                 <a:ea typeface="Georgia" pitchFamily="34" charset="-122"/>
                 <a:cs typeface="Georgia" pitchFamily="34" charset="-120"/>
               </a:rPr>
-              <a:t>"Is the convergence evidence that the tradition was 'right'? Or that human physiology hasn't changed?"</a:t>
+              <a:t>Build comparison table:</a:t>
             </a:r>
             <a:endParaRPr lang="en-US" sz="1200" dirty="0"/>
           </a:p>
@@ -4236,7 +4898,7 @@
         </p:nvSpPr>
         <p:spPr>
           <a:xfrm>
-            <a:off x="406301" y="1254323"/>
+            <a:off x="406301" y="1160413"/>
             <a:ext cx="8498026" cy="213271"/>
           </a:xfrm>
           <a:prstGeom prst="rect">
@@ -4262,7 +4924,7 @@
               <a:buNone/>
             </a:pPr>
             <a:r>
-              <a:rPr lang="en-US" sz="1200" dirty="0">
+              <a:rPr lang="en-US" sz="1200" i="1" dirty="0">
                 <a:solidFill>
                   <a:srgbClr val="1A1A1A"/>
                 </a:solidFill>
@@ -4270,7 +4932,7 @@
                 <a:ea typeface="Georgia" pitchFamily="34" charset="-122"/>
                 <a:cs typeface="Georgia" pitchFamily="34" charset="-120"/>
               </a:rPr>
-              <a:t>– Both. Don't force a binary.</a:t>
+              <a:t>Each row: Traditional principle (Caraka, BG) · Modern lifestyle medicine equivalent · Evidence.</a:t>
             </a:r>
             <a:endParaRPr lang="en-US" sz="1200" dirty="0"/>
           </a:p>
@@ -4428,7 +5090,7 @@
                 <a:ea typeface="Times New Roman" pitchFamily="34" charset="-122"/>
                 <a:cs typeface="Times New Roman" pitchFamily="34" charset="-120"/>
               </a:rPr>
-              <a:t>Wrap-up (2 min)</a:t>
+              <a:t>The convergence (15 min) (cont.)</a:t>
             </a:r>
             <a:endParaRPr lang="en-US" sz="1800" dirty="0"/>
           </a:p>
@@ -4442,8 +5104,8 @@
         </p:nvSpPr>
         <p:spPr>
           <a:xfrm>
-            <a:off x="406301" y="870942"/>
-            <a:ext cx="8498026" cy="213271"/>
+            <a:off x="634901" y="883593"/>
+            <a:ext cx="8102798" cy="1257002"/>
           </a:xfrm>
           <a:prstGeom prst="rect">
             <a:avLst/>
@@ -4455,20 +5117,18 @@
           <a:bodyPr wrap="square" lIns="0" tIns="0" rIns="0" bIns="0" rtlCol="0" anchor="t"/>
           <a:lstStyle/>
           <a:p>
-            <a:pPr algn="l" indent="0" marL="0">
-              <a:lnSpc>
-                <a:spcPts val="1680"/>
-              </a:lnSpc>
-              <a:spcBef>
-                <a:spcPts val="300"/>
-              </a:spcBef>
-              <a:spcAft>
-                <a:spcPts val="300"/>
-              </a:spcAft>
-              <a:buNone/>
-            </a:pPr>
-            <a:r>
-              <a:rPr lang="en-US" sz="1200" dirty="0">
+            <a:pPr algn="l" marL="342900" indent="-342900">
+              <a:lnSpc>
+                <a:spcPts val="1620"/>
+              </a:lnSpc>
+              <a:spcAft>
+                <a:spcPts val="300"/>
+              </a:spcAft>
+              <a:buSzPct val="100000"/>
+              <a:buChar char="•"/>
+            </a:pPr>
+            <a:r>
+              <a:rPr lang="en-US" sz="1200" b="1" dirty="0">
                 <a:solidFill>
                   <a:srgbClr val="1A1A1A"/>
                 </a:solidFill>
@@ -4476,22 +5136,19 @@
                 <a:ea typeface="Georgia" pitchFamily="34" charset="-122"/>
                 <a:cs typeface="Georgia" pitchFamily="34" charset="-120"/>
               </a:rPr>
-              <a:t>– Preview Day 7: </a:t>
+              <a:t>Wake before sunrise</a:t>
             </a:r>
             <a:pPr algn="l" indent="0" marL="0">
               <a:lnSpc>
-                <a:spcPts val="1680"/>
-              </a:lnSpc>
-              <a:spcBef>
-                <a:spcPts val="300"/>
-              </a:spcBef>
-              <a:spcAft>
-                <a:spcPts val="300"/>
-              </a:spcAft>
-              <a:buNone/>
-            </a:pPr>
-            <a:r>
-              <a:rPr lang="en-US" sz="1200" i="1" dirty="0">
+                <a:spcPts val="1620"/>
+              </a:lnSpc>
+              <a:spcAft>
+                <a:spcPts val="300"/>
+              </a:spcAft>
+              <a:buNone/>
+            </a:pPr>
+            <a:r>
+              <a:rPr lang="en-US" sz="1200" dirty="0">
                 <a:solidFill>
                   <a:srgbClr val="1A1A1A"/>
                 </a:solidFill>
@@ -4499,7 +5156,183 @@
                 <a:ea typeface="Georgia" pitchFamily="34" charset="-122"/>
                 <a:cs typeface="Georgia" pitchFamily="34" charset="-120"/>
               </a:rPr>
-              <a:t>"Tomorrow — the contemporary integration debate."</a:t>
+              <a:t> — Aligning with circadian rhythm · Nobel 2017 — circadian biology</a:t>
+            </a:r>
+            <a:endParaRPr lang="en-US" sz="1200" dirty="0"/>
+          </a:p>
+          <a:p>
+            <a:pPr algn="l" marL="342900" indent="-342900">
+              <a:lnSpc>
+                <a:spcPts val="1620"/>
+              </a:lnSpc>
+              <a:spcAft>
+                <a:spcPts val="300"/>
+              </a:spcAft>
+              <a:buSzPct val="100000"/>
+              <a:buChar char="•"/>
+            </a:pPr>
+            <a:r>
+              <a:rPr lang="en-US" sz="1200" b="1" dirty="0">
+                <a:solidFill>
+                  <a:srgbClr val="1A1A1A"/>
+                </a:solidFill>
+                <a:latin typeface="Georgia" pitchFamily="34" charset="0"/>
+                <a:ea typeface="Georgia" pitchFamily="34" charset="-122"/>
+                <a:cs typeface="Georgia" pitchFamily="34" charset="-120"/>
+              </a:rPr>
+              <a:t>Largest meal midday (Pitta peak)</a:t>
+            </a:r>
+            <a:pPr algn="l" indent="0" marL="0">
+              <a:lnSpc>
+                <a:spcPts val="1620"/>
+              </a:lnSpc>
+              <a:spcAft>
+                <a:spcPts val="300"/>
+              </a:spcAft>
+              <a:buNone/>
+            </a:pPr>
+            <a:r>
+              <a:rPr lang="en-US" sz="1200" dirty="0">
+                <a:solidFill>
+                  <a:srgbClr val="1A1A1A"/>
+                </a:solidFill>
+                <a:latin typeface="Georgia" pitchFamily="34" charset="0"/>
+                <a:ea typeface="Georgia" pitchFamily="34" charset="-122"/>
+                <a:cs typeface="Georgia" pitchFamily="34" charset="-120"/>
+              </a:rPr>
+              <a:t> — Time-restricted eating; metabolic window · Panda et al. (2018)</a:t>
+            </a:r>
+            <a:endParaRPr lang="en-US" sz="1200" dirty="0"/>
+          </a:p>
+          <a:p>
+            <a:pPr algn="l" marL="342900" indent="-342900">
+              <a:lnSpc>
+                <a:spcPts val="1620"/>
+              </a:lnSpc>
+              <a:spcAft>
+                <a:spcPts val="300"/>
+              </a:spcAft>
+              <a:buSzPct val="100000"/>
+              <a:buChar char="•"/>
+            </a:pPr>
+            <a:r>
+              <a:rPr lang="en-US" sz="1200" b="1" dirty="0">
+                <a:solidFill>
+                  <a:srgbClr val="1A1A1A"/>
+                </a:solidFill>
+                <a:latin typeface="Georgia" pitchFamily="34" charset="0"/>
+                <a:ea typeface="Georgia" pitchFamily="34" charset="-122"/>
+                <a:cs typeface="Georgia" pitchFamily="34" charset="-120"/>
+              </a:rPr>
+              <a:t>Sleep by ~10pm</a:t>
+            </a:r>
+            <a:pPr algn="l" indent="0" marL="0">
+              <a:lnSpc>
+                <a:spcPts val="1620"/>
+              </a:lnSpc>
+              <a:spcAft>
+                <a:spcPts val="300"/>
+              </a:spcAft>
+              <a:buNone/>
+            </a:pPr>
+            <a:r>
+              <a:rPr lang="en-US" sz="1200" dirty="0">
+                <a:solidFill>
+                  <a:srgbClr val="1A1A1A"/>
+                </a:solidFill>
+                <a:latin typeface="Georgia" pitchFamily="34" charset="0"/>
+                <a:ea typeface="Georgia" pitchFamily="34" charset="-122"/>
+                <a:cs typeface="Georgia" pitchFamily="34" charset="-120"/>
+              </a:rPr>
+              <a:t> — Aligning with melatonin curve · Sleep science (Walker 2017)</a:t>
+            </a:r>
+            <a:endParaRPr lang="en-US" sz="1200" dirty="0"/>
+          </a:p>
+          <a:p>
+            <a:pPr algn="l" marL="342900" indent="-342900">
+              <a:lnSpc>
+                <a:spcPts val="1620"/>
+              </a:lnSpc>
+              <a:spcAft>
+                <a:spcPts val="300"/>
+              </a:spcAft>
+              <a:buSzPct val="100000"/>
+              <a:buChar char="•"/>
+            </a:pPr>
+            <a:r>
+              <a:rPr lang="en-US" sz="1200" b="1" dirty="0">
+                <a:solidFill>
+                  <a:srgbClr val="1A1A1A"/>
+                </a:solidFill>
+                <a:latin typeface="Georgia" pitchFamily="34" charset="0"/>
+                <a:ea typeface="Georgia" pitchFamily="34" charset="-122"/>
+                <a:cs typeface="Georgia" pitchFamily="34" charset="-120"/>
+              </a:rPr>
+              <a:t>Regular exercise to 50% capacity</a:t>
+            </a:r>
+            <a:pPr algn="l" indent="0" marL="0">
+              <a:lnSpc>
+                <a:spcPts val="1620"/>
+              </a:lnSpc>
+              <a:spcAft>
+                <a:spcPts val="300"/>
+              </a:spcAft>
+              <a:buNone/>
+            </a:pPr>
+            <a:r>
+              <a:rPr lang="en-US" sz="1200" dirty="0">
+                <a:solidFill>
+                  <a:srgbClr val="1A1A1A"/>
+                </a:solidFill>
+                <a:latin typeface="Georgia" pitchFamily="34" charset="0"/>
+                <a:ea typeface="Georgia" pitchFamily="34" charset="-122"/>
+                <a:cs typeface="Georgia" pitchFamily="34" charset="-120"/>
+              </a:rPr>
+              <a:t> — Moderate-intensity training · Standard exercise physiology</a:t>
+            </a:r>
+            <a:endParaRPr lang="en-US" sz="1200" dirty="0"/>
+          </a:p>
+          <a:p>
+            <a:pPr algn="l" marL="342900" indent="-342900">
+              <a:lnSpc>
+                <a:spcPts val="1620"/>
+              </a:lnSpc>
+              <a:spcAft>
+                <a:spcPts val="300"/>
+              </a:spcAft>
+              <a:buSzPct val="100000"/>
+              <a:buChar char="•"/>
+            </a:pPr>
+            <a:r>
+              <a:rPr lang="en-US" sz="1200" b="1" dirty="0">
+                <a:solidFill>
+                  <a:srgbClr val="1A1A1A"/>
+                </a:solidFill>
+                <a:latin typeface="Georgia" pitchFamily="34" charset="0"/>
+                <a:ea typeface="Georgia" pitchFamily="34" charset="-122"/>
+                <a:cs typeface="Georgia" pitchFamily="34" charset="-120"/>
+              </a:rPr>
+              <a:t>Six tastes per meal</a:t>
+            </a:r>
+            <a:pPr algn="l" indent="0" marL="0">
+              <a:lnSpc>
+                <a:spcPts val="1620"/>
+              </a:lnSpc>
+              <a:spcAft>
+                <a:spcPts val="300"/>
+              </a:spcAft>
+              <a:buNone/>
+            </a:pPr>
+            <a:r>
+              <a:rPr lang="en-US" sz="1200" dirty="0">
+                <a:solidFill>
+                  <a:srgbClr val="1A1A1A"/>
+                </a:solidFill>
+                <a:latin typeface="Georgia" pitchFamily="34" charset="0"/>
+                <a:ea typeface="Georgia" pitchFamily="34" charset="-122"/>
+                <a:cs typeface="Georgia" pitchFamily="34" charset="-120"/>
+              </a:rPr>
+              <a:t> — Macronutrient diversity, polyphenol intake · Nutrition science</a:t>
             </a:r>
             <a:endParaRPr lang="en-US" sz="1200" dirty="0"/>
           </a:p>
@@ -4657,7 +5490,7 @@
                 <a:ea typeface="Times New Roman" pitchFamily="34" charset="-122"/>
                 <a:cs typeface="Times New Roman" pitchFamily="34" charset="-120"/>
               </a:rPr>
-              <a:t>Differentiation</a:t>
+              <a:t>The convergence (15 min) (cont.)</a:t>
             </a:r>
             <a:endParaRPr lang="en-US" sz="1800" dirty="0"/>
           </a:p>
@@ -4671,8 +5504,8 @@
         </p:nvSpPr>
         <p:spPr>
           <a:xfrm>
-            <a:off x="634901" y="883593"/>
-            <a:ext cx="8102798" cy="525661"/>
+            <a:off x="406301" y="870942"/>
+            <a:ext cx="8498026" cy="426541"/>
           </a:xfrm>
           <a:prstGeom prst="rect">
             <a:avLst/>
@@ -4684,15 +5517,17 @@
           <a:bodyPr wrap="square" lIns="0" tIns="0" rIns="0" bIns="0" rtlCol="0" anchor="t"/>
           <a:lstStyle/>
           <a:p>
-            <a:pPr algn="l" marL="342900" indent="-342900">
-              <a:lnSpc>
-                <a:spcPts val="1620"/>
-              </a:lnSpc>
-              <a:spcAft>
-                <a:spcPts val="300"/>
-              </a:spcAft>
-              <a:buSzPct val="100000"/>
-              <a:buChar char="•"/>
+            <a:pPr algn="l" indent="0" marL="0">
+              <a:lnSpc>
+                <a:spcPts val="1680"/>
+              </a:lnSpc>
+              <a:spcBef>
+                <a:spcPts val="300"/>
+              </a:spcBef>
+              <a:spcAft>
+                <a:spcPts val="300"/>
+              </a:spcAft>
+              <a:buNone/>
             </a:pPr>
             <a:r>
               <a:rPr lang="en-US" sz="1200" b="1" dirty="0">
@@ -4703,12 +5538,15 @@
                 <a:ea typeface="Georgia" pitchFamily="34" charset="-122"/>
                 <a:cs typeface="Georgia" pitchFamily="34" charset="-120"/>
               </a:rPr>
-              <a:t>Tier up:</a:t>
+              <a:t>Note the convergence is striking but not identical.</a:t>
             </a:r>
             <a:pPr algn="l" indent="0" marL="0">
               <a:lnSpc>
-                <a:spcPts val="1620"/>
-              </a:lnSpc>
+                <a:spcPts val="1680"/>
+              </a:lnSpc>
+              <a:spcBef>
+                <a:spcPts val="300"/>
+              </a:spcBef>
               <a:spcAft>
                 <a:spcPts val="300"/>
               </a:spcAft>
@@ -4723,91 +5561,7 @@
                 <a:ea typeface="Georgia" pitchFamily="34" charset="-122"/>
                 <a:cs typeface="Georgia" pitchFamily="34" charset="-120"/>
               </a:rPr>
-              <a:t> Read Walker (2017) </a:t>
-            </a:r>
-            <a:pPr algn="l" indent="0" marL="0">
-              <a:lnSpc>
-                <a:spcPts val="1620"/>
-              </a:lnSpc>
-              <a:spcAft>
-                <a:spcPts val="300"/>
-              </a:spcAft>
-              <a:buNone/>
-            </a:pPr>
-            <a:r>
-              <a:rPr lang="en-US" sz="1200" i="1" dirty="0">
-                <a:solidFill>
-                  <a:srgbClr val="1A1A1A"/>
-                </a:solidFill>
-                <a:latin typeface="Georgia" pitchFamily="34" charset="0"/>
-                <a:ea typeface="Georgia" pitchFamily="34" charset="-122"/>
-                <a:cs typeface="Georgia" pitchFamily="34" charset="-120"/>
-              </a:rPr>
-              <a:t>Why We Sleep</a:t>
-            </a:r>
-            <a:pPr algn="l" indent="0" marL="0">
-              <a:lnSpc>
-                <a:spcPts val="1620"/>
-              </a:lnSpc>
-              <a:spcAft>
-                <a:spcPts val="300"/>
-              </a:spcAft>
-              <a:buNone/>
-            </a:pPr>
-            <a:r>
-              <a:rPr lang="en-US" sz="1200" dirty="0">
-                <a:solidFill>
-                  <a:srgbClr val="1A1A1A"/>
-                </a:solidFill>
-                <a:latin typeface="Georgia" pitchFamily="34" charset="0"/>
-                <a:ea typeface="Georgia" pitchFamily="34" charset="-122"/>
-                <a:cs typeface="Georgia" pitchFamily="34" charset="-120"/>
-              </a:rPr>
-              <a:t> chapter on circadian.</a:t>
-            </a:r>
-            <a:endParaRPr lang="en-US" sz="1200" dirty="0"/>
-          </a:p>
-          <a:p>
-            <a:pPr algn="l" marL="342900" indent="-342900">
-              <a:lnSpc>
-                <a:spcPts val="1620"/>
-              </a:lnSpc>
-              <a:spcAft>
-                <a:spcPts val="300"/>
-              </a:spcAft>
-              <a:buSzPct val="100000"/>
-              <a:buChar char="•"/>
-            </a:pPr>
-            <a:r>
-              <a:rPr lang="en-US" sz="1200" b="1" dirty="0">
-                <a:solidFill>
-                  <a:srgbClr val="1A1A1A"/>
-                </a:solidFill>
-                <a:latin typeface="Georgia" pitchFamily="34" charset="0"/>
-                <a:ea typeface="Georgia" pitchFamily="34" charset="-122"/>
-                <a:cs typeface="Georgia" pitchFamily="34" charset="-120"/>
-              </a:rPr>
-              <a:t>Tier down:</a:t>
-            </a:r>
-            <a:pPr algn="l" indent="0" marL="0">
-              <a:lnSpc>
-                <a:spcPts val="1620"/>
-              </a:lnSpc>
-              <a:spcAft>
-                <a:spcPts val="300"/>
-              </a:spcAft>
-              <a:buNone/>
-            </a:pPr>
-            <a:r>
-              <a:rPr lang="en-US" sz="1200" dirty="0">
-                <a:solidFill>
-                  <a:srgbClr val="1A1A1A"/>
-                </a:solidFill>
-                <a:latin typeface="Georgia" pitchFamily="34" charset="0"/>
-                <a:ea typeface="Georgia" pitchFamily="34" charset="-122"/>
-                <a:cs typeface="Georgia" pitchFamily="34" charset="-120"/>
-              </a:rPr>
-              <a:t> Focus on the convergence table.</a:t>
+              <a:t> The tradition observed; modern science measures. They overlap in many places; they're not the same project.</a:t>
             </a:r>
             <a:endParaRPr lang="en-US" sz="1200" dirty="0"/>
           </a:p>
